--- a/Docs/Design/UI/UI기획_인벤토리.pptx
+++ b/Docs/Design/UI/UI기획_인벤토리.pptx
@@ -7,6 +7,7 @@
   <p:sldIdLst>
     <p:sldId id="256" r:id="rId2"/>
     <p:sldId id="257" r:id="rId3"/>
+    <p:sldId id="258" r:id="rId4"/>
   </p:sldIdLst>
   <p:sldSz cx="12192000" cy="6858000"/>
   <p:notesSz cx="6858000" cy="9144000"/>
@@ -105,6 +106,11 @@
       </a:defRPr>
     </a:lvl9pPr>
   </p:defaultTextStyle>
+  <p:extLst>
+    <p:ext uri="{EFAFB233-063F-42B5-8137-9DF3F51BA10A}">
+      <p15:sldGuideLst xmlns:p15="http://schemas.microsoft.com/office/powerpoint/2012/main"/>
+    </p:ext>
+  </p:extLst>
 </p:presentation>
 </file>
 
@@ -255,7 +261,7 @@
           <a:p>
             <a:fld id="{0F9DA38A-AD18-4514-81BD-890B8AE83131}" type="datetimeFigureOut">
               <a:rPr lang="ko-KR" altLang="en-US" smtClean="0"/>
-              <a:t>2025-10-21</a:t>
+              <a:t>2025-10-22</a:t>
             </a:fld>
             <a:endParaRPr lang="ko-KR" altLang="en-US"/>
           </a:p>
@@ -453,7 +459,7 @@
           <a:p>
             <a:fld id="{0F9DA38A-AD18-4514-81BD-890B8AE83131}" type="datetimeFigureOut">
               <a:rPr lang="ko-KR" altLang="en-US" smtClean="0"/>
-              <a:t>2025-10-21</a:t>
+              <a:t>2025-10-22</a:t>
             </a:fld>
             <a:endParaRPr lang="ko-KR" altLang="en-US"/>
           </a:p>
@@ -661,7 +667,7 @@
           <a:p>
             <a:fld id="{0F9DA38A-AD18-4514-81BD-890B8AE83131}" type="datetimeFigureOut">
               <a:rPr lang="ko-KR" altLang="en-US" smtClean="0"/>
-              <a:t>2025-10-21</a:t>
+              <a:t>2025-10-22</a:t>
             </a:fld>
             <a:endParaRPr lang="ko-KR" altLang="en-US"/>
           </a:p>
@@ -859,7 +865,7 @@
           <a:p>
             <a:fld id="{0F9DA38A-AD18-4514-81BD-890B8AE83131}" type="datetimeFigureOut">
               <a:rPr lang="ko-KR" altLang="en-US" smtClean="0"/>
-              <a:t>2025-10-21</a:t>
+              <a:t>2025-10-22</a:t>
             </a:fld>
             <a:endParaRPr lang="ko-KR" altLang="en-US"/>
           </a:p>
@@ -1134,7 +1140,7 @@
           <a:p>
             <a:fld id="{0F9DA38A-AD18-4514-81BD-890B8AE83131}" type="datetimeFigureOut">
               <a:rPr lang="ko-KR" altLang="en-US" smtClean="0"/>
-              <a:t>2025-10-21</a:t>
+              <a:t>2025-10-22</a:t>
             </a:fld>
             <a:endParaRPr lang="ko-KR" altLang="en-US"/>
           </a:p>
@@ -1399,7 +1405,7 @@
           <a:p>
             <a:fld id="{0F9DA38A-AD18-4514-81BD-890B8AE83131}" type="datetimeFigureOut">
               <a:rPr lang="ko-KR" altLang="en-US" smtClean="0"/>
-              <a:t>2025-10-21</a:t>
+              <a:t>2025-10-22</a:t>
             </a:fld>
             <a:endParaRPr lang="ko-KR" altLang="en-US"/>
           </a:p>
@@ -1811,7 +1817,7 @@
           <a:p>
             <a:fld id="{0F9DA38A-AD18-4514-81BD-890B8AE83131}" type="datetimeFigureOut">
               <a:rPr lang="ko-KR" altLang="en-US" smtClean="0"/>
-              <a:t>2025-10-21</a:t>
+              <a:t>2025-10-22</a:t>
             </a:fld>
             <a:endParaRPr lang="ko-KR" altLang="en-US"/>
           </a:p>
@@ -1952,7 +1958,7 @@
           <a:p>
             <a:fld id="{0F9DA38A-AD18-4514-81BD-890B8AE83131}" type="datetimeFigureOut">
               <a:rPr lang="ko-KR" altLang="en-US" smtClean="0"/>
-              <a:t>2025-10-21</a:t>
+              <a:t>2025-10-22</a:t>
             </a:fld>
             <a:endParaRPr lang="ko-KR" altLang="en-US"/>
           </a:p>
@@ -2065,7 +2071,7 @@
           <a:p>
             <a:fld id="{0F9DA38A-AD18-4514-81BD-890B8AE83131}" type="datetimeFigureOut">
               <a:rPr lang="ko-KR" altLang="en-US" smtClean="0"/>
-              <a:t>2025-10-21</a:t>
+              <a:t>2025-10-22</a:t>
             </a:fld>
             <a:endParaRPr lang="ko-KR" altLang="en-US"/>
           </a:p>
@@ -2376,7 +2382,7 @@
           <a:p>
             <a:fld id="{0F9DA38A-AD18-4514-81BD-890B8AE83131}" type="datetimeFigureOut">
               <a:rPr lang="ko-KR" altLang="en-US" smtClean="0"/>
-              <a:t>2025-10-21</a:t>
+              <a:t>2025-10-22</a:t>
             </a:fld>
             <a:endParaRPr lang="ko-KR" altLang="en-US"/>
           </a:p>
@@ -2664,7 +2670,7 @@
           <a:p>
             <a:fld id="{0F9DA38A-AD18-4514-81BD-890B8AE83131}" type="datetimeFigureOut">
               <a:rPr lang="ko-KR" altLang="en-US" smtClean="0"/>
-              <a:t>2025-10-21</a:t>
+              <a:t>2025-10-22</a:t>
             </a:fld>
             <a:endParaRPr lang="ko-KR" altLang="en-US"/>
           </a:p>
@@ -2905,7 +2911,7 @@
           <a:p>
             <a:fld id="{0F9DA38A-AD18-4514-81BD-890B8AE83131}" type="datetimeFigureOut">
               <a:rPr lang="ko-KR" altLang="en-US" smtClean="0"/>
-              <a:t>2025-10-21</a:t>
+              <a:t>2025-10-22</a:t>
             </a:fld>
             <a:endParaRPr lang="ko-KR" altLang="en-US"/>
           </a:p>
@@ -3394,7 +3400,7 @@
         <p:spPr>
           <a:xfrm>
             <a:off x="3989540" y="1584543"/>
-            <a:ext cx="3475972" cy="4797469"/>
+            <a:ext cx="3475972" cy="3051465"/>
           </a:xfrm>
           <a:prstGeom prst="rect">
             <a:avLst/>
@@ -3442,8 +3448,8 @@
         </p:nvSpPr>
         <p:spPr>
           <a:xfrm>
-            <a:off x="7615825" y="1584543"/>
-            <a:ext cx="2511468" cy="4797469"/>
+            <a:off x="3989541" y="4736217"/>
+            <a:ext cx="3475972" cy="1645795"/>
           </a:xfrm>
           <a:prstGeom prst="rect">
             <a:avLst/>
@@ -3470,6 +3476,18 @@
           <a:lstStyle/>
           <a:p>
             <a:pPr algn="ctr"/>
+            <a:r>
+              <a:rPr lang="en-US" altLang="ko-KR" dirty="0"/>
+              <a:t>(</a:t>
+            </a:r>
+            <a:r>
+              <a:rPr lang="ko-KR" altLang="en-US" dirty="0"/>
+              <a:t>현재 선택한</a:t>
+            </a:r>
+            <a:r>
+              <a:rPr lang="en-US" altLang="ko-KR" dirty="0"/>
+              <a:t>) </a:t>
+            </a:r>
             <a:r>
               <a:rPr lang="ko-KR" altLang="en-US" dirty="0"/>
               <a:t>아이템 상세 정보</a:t>
@@ -3995,6 +4013,67 @@
           </p:txBody>
         </p:sp>
       </p:grpSp>
+      <p:sp>
+        <p:nvSpPr>
+          <p:cNvPr id="2" name="직사각형 1">
+            <a:extLst>
+              <a:ext uri="{FF2B5EF4-FFF2-40B4-BE49-F238E27FC236}">
+                <a16:creationId xmlns:a16="http://schemas.microsoft.com/office/drawing/2014/main" id="{3350DC88-7C97-C775-871F-7FB85ABA2B62}"/>
+              </a:ext>
+            </a:extLst>
+          </p:cNvPr>
+          <p:cNvSpPr/>
+          <p:nvPr/>
+        </p:nvSpPr>
+        <p:spPr>
+          <a:xfrm>
+            <a:off x="7615825" y="1584543"/>
+            <a:ext cx="2511468" cy="4797468"/>
+          </a:xfrm>
+          <a:prstGeom prst="rect">
+            <a:avLst/>
+          </a:prstGeom>
+        </p:spPr>
+        <p:style>
+          <a:lnRef idx="2">
+            <a:schemeClr val="accent1">
+              <a:shade val="15000"/>
+            </a:schemeClr>
+          </a:lnRef>
+          <a:fillRef idx="1">
+            <a:schemeClr val="accent1"/>
+          </a:fillRef>
+          <a:effectRef idx="0">
+            <a:schemeClr val="accent1"/>
+          </a:effectRef>
+          <a:fontRef idx="minor">
+            <a:schemeClr val="lt1"/>
+          </a:fontRef>
+        </p:style>
+        <p:txBody>
+          <a:bodyPr rtlCol="0" anchor="ctr"/>
+          <a:lstStyle/>
+          <a:p>
+            <a:pPr algn="ctr"/>
+            <a:r>
+              <a:rPr lang="ko-KR" altLang="en-US" dirty="0"/>
+              <a:t>캐릭터</a:t>
+            </a:r>
+            <a:endParaRPr lang="en-US" altLang="ko-KR" dirty="0"/>
+          </a:p>
+          <a:p>
+            <a:pPr algn="ctr"/>
+            <a:r>
+              <a:rPr lang="ko-KR" altLang="en-US" dirty="0" err="1"/>
+              <a:t>스테이터스</a:t>
+            </a:r>
+            <a:r>
+              <a:rPr lang="ko-KR" altLang="en-US" dirty="0"/>
+              <a:t> 정보</a:t>
+            </a:r>
+          </a:p>
+        </p:txBody>
+      </p:sp>
     </p:spTree>
     <p:extLst>
       <p:ext uri="{BB962C8B-B14F-4D97-AF65-F5344CB8AC3E}">
@@ -4033,10 +4112,10 @@
       </p:grpSpPr>
       <p:sp>
         <p:nvSpPr>
-          <p:cNvPr id="4" name="직사각형 3">
-            <a:extLst>
-              <a:ext uri="{FF2B5EF4-FFF2-40B4-BE49-F238E27FC236}">
-                <a16:creationId xmlns:a16="http://schemas.microsoft.com/office/drawing/2014/main" id="{5A8CE005-38C3-B90C-C4FA-DE5D272D7107}"/>
+          <p:cNvPr id="38" name="직사각형 37">
+            <a:extLst>
+              <a:ext uri="{FF2B5EF4-FFF2-40B4-BE49-F238E27FC236}">
+                <a16:creationId xmlns:a16="http://schemas.microsoft.com/office/drawing/2014/main" id="{449C8F48-F46A-7CEC-1185-101E46D60F36}"/>
               </a:ext>
             </a:extLst>
           </p:cNvPr>
@@ -4045,8 +4124,8 @@
         </p:nvSpPr>
         <p:spPr>
           <a:xfrm>
-            <a:off x="1346548" y="1584544"/>
-            <a:ext cx="2492679" cy="2210842"/>
+            <a:off x="7615825" y="1584543"/>
+            <a:ext cx="2511468" cy="4797468"/>
           </a:xfrm>
           <a:prstGeom prst="rect">
             <a:avLst/>
@@ -4073,16 +4152,43 @@
           <a:lstStyle/>
           <a:p>
             <a:pPr algn="ctr"/>
-            <a:endParaRPr lang="ko-KR" altLang="en-US" dirty="0"/>
-          </a:p>
-        </p:txBody>
-      </p:sp>
-      <p:sp>
-        <p:nvSpPr>
-          <p:cNvPr id="5" name="직사각형 4">
-            <a:extLst>
-              <a:ext uri="{FF2B5EF4-FFF2-40B4-BE49-F238E27FC236}">
-                <a16:creationId xmlns:a16="http://schemas.microsoft.com/office/drawing/2014/main" id="{2B8F13A5-6F9E-5A53-119F-7D33A09C195F}"/>
+            <a:r>
+              <a:rPr lang="ko-KR" altLang="en-US" dirty="0"/>
+              <a:t>캐릭터</a:t>
+            </a:r>
+            <a:endParaRPr lang="en-US" altLang="ko-KR" dirty="0"/>
+          </a:p>
+          <a:p>
+            <a:pPr algn="ctr"/>
+            <a:r>
+              <a:rPr lang="ko-KR" altLang="en-US" dirty="0" err="1"/>
+              <a:t>스테이터스</a:t>
+            </a:r>
+            <a:r>
+              <a:rPr lang="ko-KR" altLang="en-US" dirty="0"/>
+              <a:t> 정보</a:t>
+            </a:r>
+            <a:endParaRPr lang="en-US" altLang="ko-KR" dirty="0"/>
+          </a:p>
+          <a:p>
+            <a:pPr algn="ctr"/>
+            <a:endParaRPr lang="en-US" altLang="ko-KR" dirty="0"/>
+          </a:p>
+          <a:p>
+            <a:pPr algn="ctr"/>
+            <a:r>
+              <a:rPr lang="ko-KR" altLang="en-US" dirty="0"/>
+              <a:t>나중에 구현</a:t>
+            </a:r>
+          </a:p>
+        </p:txBody>
+      </p:sp>
+      <p:sp>
+        <p:nvSpPr>
+          <p:cNvPr id="4" name="직사각형 3">
+            <a:extLst>
+              <a:ext uri="{FF2B5EF4-FFF2-40B4-BE49-F238E27FC236}">
+                <a16:creationId xmlns:a16="http://schemas.microsoft.com/office/drawing/2014/main" id="{5A8CE005-38C3-B90C-C4FA-DE5D272D7107}"/>
               </a:ext>
             </a:extLst>
           </p:cNvPr>
@@ -4091,8 +4197,8 @@
         </p:nvSpPr>
         <p:spPr>
           <a:xfrm>
-            <a:off x="3989540" y="1584543"/>
-            <a:ext cx="3475972" cy="4797469"/>
+            <a:off x="1346548" y="1584544"/>
+            <a:ext cx="2492679" cy="2210842"/>
           </a:xfrm>
           <a:prstGeom prst="rect">
             <a:avLst/>
@@ -4119,19 +4225,16 @@
           <a:lstStyle/>
           <a:p>
             <a:pPr algn="ctr"/>
-            <a:r>
-              <a:rPr lang="ko-KR" altLang="en-US" dirty="0"/>
-              <a:t>인벤토리</a:t>
-            </a:r>
-          </a:p>
-        </p:txBody>
-      </p:sp>
-      <p:sp>
-        <p:nvSpPr>
-          <p:cNvPr id="6" name="직사각형 5">
-            <a:extLst>
-              <a:ext uri="{FF2B5EF4-FFF2-40B4-BE49-F238E27FC236}">
-                <a16:creationId xmlns:a16="http://schemas.microsoft.com/office/drawing/2014/main" id="{AA0134DE-FF1F-378B-7670-C45EC197D03F}"/>
+            <a:endParaRPr lang="ko-KR" altLang="en-US" dirty="0"/>
+          </a:p>
+        </p:txBody>
+      </p:sp>
+      <p:sp>
+        <p:nvSpPr>
+          <p:cNvPr id="5" name="직사각형 4">
+            <a:extLst>
+              <a:ext uri="{FF2B5EF4-FFF2-40B4-BE49-F238E27FC236}">
+                <a16:creationId xmlns:a16="http://schemas.microsoft.com/office/drawing/2014/main" id="{2B8F13A5-6F9E-5A53-119F-7D33A09C195F}"/>
               </a:ext>
             </a:extLst>
           </p:cNvPr>
@@ -4140,8 +4243,8 @@
         </p:nvSpPr>
         <p:spPr>
           <a:xfrm>
-            <a:off x="7615825" y="1584543"/>
-            <a:ext cx="2511468" cy="4797469"/>
+            <a:off x="3989540" y="1584543"/>
+            <a:ext cx="3475972" cy="3024033"/>
           </a:xfrm>
           <a:prstGeom prst="rect">
             <a:avLst/>
@@ -4168,7 +4271,7 @@
           <a:lstStyle/>
           <a:p>
             <a:pPr algn="ctr"/>
-            <a:endParaRPr lang="en-US" altLang="ko-KR" dirty="0"/>
+            <a:endParaRPr lang="ko-KR" altLang="en-US" dirty="0"/>
           </a:p>
         </p:txBody>
       </p:sp>
@@ -4679,6 +4782,11 @@
           <a:prstGeom prst="rect">
             <a:avLst/>
           </a:prstGeom>
+          <a:solidFill>
+            <a:schemeClr val="bg1">
+              <a:lumMod val="75000"/>
+            </a:schemeClr>
+          </a:solidFill>
         </p:spPr>
         <p:style>
           <a:lnRef idx="2">
@@ -4697,10 +4805,14 @@
           </a:fontRef>
         </p:style>
         <p:txBody>
-          <a:bodyPr rtlCol="0" anchor="ctr"/>
+          <a:bodyPr wrap="none" rtlCol="0" anchor="ctr"/>
           <a:lstStyle/>
           <a:p>
             <a:pPr algn="ctr"/>
+            <a:r>
+              <a:rPr lang="en-US" altLang="ko-KR" dirty="0"/>
+              <a:t>Icon</a:t>
+            </a:r>
             <a:endParaRPr lang="ko-KR" altLang="en-US" dirty="0"/>
           </a:p>
         </p:txBody>
@@ -4725,6 +4837,11 @@
           <a:prstGeom prst="rect">
             <a:avLst/>
           </a:prstGeom>
+          <a:solidFill>
+            <a:schemeClr val="bg1">
+              <a:lumMod val="75000"/>
+            </a:schemeClr>
+          </a:solidFill>
         </p:spPr>
         <p:style>
           <a:lnRef idx="2">
@@ -4743,10 +4860,14 @@
           </a:fontRef>
         </p:style>
         <p:txBody>
-          <a:bodyPr rtlCol="0" anchor="ctr"/>
+          <a:bodyPr wrap="none" rtlCol="0" anchor="ctr"/>
           <a:lstStyle/>
           <a:p>
             <a:pPr algn="ctr"/>
+            <a:r>
+              <a:rPr lang="en-US" altLang="ko-KR" dirty="0"/>
+              <a:t>Icon</a:t>
+            </a:r>
             <a:endParaRPr lang="ko-KR" altLang="en-US" dirty="0"/>
           </a:p>
         </p:txBody>
@@ -4771,6 +4892,11 @@
           <a:prstGeom prst="rect">
             <a:avLst/>
           </a:prstGeom>
+          <a:solidFill>
+            <a:schemeClr val="bg1">
+              <a:lumMod val="75000"/>
+            </a:schemeClr>
+          </a:solidFill>
         </p:spPr>
         <p:style>
           <a:lnRef idx="2">
@@ -4789,10 +4915,14 @@
           </a:fontRef>
         </p:style>
         <p:txBody>
-          <a:bodyPr rtlCol="0" anchor="ctr"/>
+          <a:bodyPr wrap="none" rtlCol="0" anchor="ctr"/>
           <a:lstStyle/>
           <a:p>
             <a:pPr algn="ctr"/>
+            <a:r>
+              <a:rPr lang="en-US" altLang="ko-KR" dirty="0"/>
+              <a:t>Icon</a:t>
+            </a:r>
             <a:endParaRPr lang="ko-KR" altLang="en-US" dirty="0"/>
           </a:p>
         </p:txBody>
@@ -4817,6 +4947,11 @@
           <a:prstGeom prst="rect">
             <a:avLst/>
           </a:prstGeom>
+          <a:solidFill>
+            <a:schemeClr val="bg1">
+              <a:lumMod val="75000"/>
+            </a:schemeClr>
+          </a:solidFill>
         </p:spPr>
         <p:style>
           <a:lnRef idx="2">
@@ -4835,10 +4970,14 @@
           </a:fontRef>
         </p:style>
         <p:txBody>
-          <a:bodyPr rtlCol="0" anchor="ctr"/>
+          <a:bodyPr wrap="none" rtlCol="0" anchor="ctr"/>
           <a:lstStyle/>
           <a:p>
             <a:pPr algn="ctr"/>
+            <a:r>
+              <a:rPr lang="en-US" altLang="ko-KR" dirty="0"/>
+              <a:t>Icon</a:t>
+            </a:r>
             <a:endParaRPr lang="ko-KR" altLang="en-US" dirty="0"/>
           </a:p>
         </p:txBody>
@@ -4863,6 +5002,11 @@
           <a:prstGeom prst="rect">
             <a:avLst/>
           </a:prstGeom>
+          <a:solidFill>
+            <a:schemeClr val="bg1">
+              <a:lumMod val="75000"/>
+            </a:schemeClr>
+          </a:solidFill>
         </p:spPr>
         <p:style>
           <a:lnRef idx="2">
@@ -4881,10 +5025,14 @@
           </a:fontRef>
         </p:style>
         <p:txBody>
-          <a:bodyPr rtlCol="0" anchor="ctr"/>
+          <a:bodyPr wrap="none" rtlCol="0" anchor="ctr"/>
           <a:lstStyle/>
           <a:p>
             <a:pPr algn="ctr"/>
+            <a:r>
+              <a:rPr lang="en-US" altLang="ko-KR" dirty="0"/>
+              <a:t>Icon</a:t>
+            </a:r>
             <a:endParaRPr lang="ko-KR" altLang="en-US" dirty="0"/>
           </a:p>
         </p:txBody>
@@ -5051,10 +5199,10 @@
       </p:sp>
       <p:sp>
         <p:nvSpPr>
-          <p:cNvPr id="24" name="직사각형 23">
-            <a:extLst>
-              <a:ext uri="{FF2B5EF4-FFF2-40B4-BE49-F238E27FC236}">
-                <a16:creationId xmlns:a16="http://schemas.microsoft.com/office/drawing/2014/main" id="{063D44F7-77FC-0DEE-0792-29B603599A02}"/>
+          <p:cNvPr id="31" name="직사각형 30">
+            <a:extLst>
+              <a:ext uri="{FF2B5EF4-FFF2-40B4-BE49-F238E27FC236}">
+                <a16:creationId xmlns:a16="http://schemas.microsoft.com/office/drawing/2014/main" id="{D6BF24F3-46C5-3F93-552A-12BE9C777852}"/>
               </a:ext>
             </a:extLst>
           </p:cNvPr>
@@ -5063,12 +5211,17 @@
         </p:nvSpPr>
         <p:spPr>
           <a:xfrm>
-            <a:off x="7711692" y="1712934"/>
+            <a:off x="1498782" y="3995803"/>
             <a:ext cx="565925" cy="541752"/>
           </a:xfrm>
           <a:prstGeom prst="rect">
             <a:avLst/>
           </a:prstGeom>
+          <a:solidFill>
+            <a:schemeClr val="bg1">
+              <a:lumMod val="75000"/>
+            </a:schemeClr>
+          </a:solidFill>
         </p:spPr>
         <p:style>
           <a:lnRef idx="2">
@@ -5087,20 +5240,24 @@
           </a:fontRef>
         </p:style>
         <p:txBody>
-          <a:bodyPr rtlCol="0" anchor="ctr"/>
+          <a:bodyPr wrap="none" rtlCol="0" anchor="ctr"/>
           <a:lstStyle/>
           <a:p>
             <a:pPr algn="ctr"/>
+            <a:r>
+              <a:rPr lang="en-US" altLang="ko-KR" dirty="0"/>
+              <a:t>Icon</a:t>
+            </a:r>
             <a:endParaRPr lang="ko-KR" altLang="en-US" dirty="0"/>
           </a:p>
         </p:txBody>
       </p:sp>
       <p:sp>
         <p:nvSpPr>
-          <p:cNvPr id="25" name="직사각형 24">
-            <a:extLst>
-              <a:ext uri="{FF2B5EF4-FFF2-40B4-BE49-F238E27FC236}">
-                <a16:creationId xmlns:a16="http://schemas.microsoft.com/office/drawing/2014/main" id="{DB6C07ED-2348-2D5B-37A5-B2D0F3CA82F3}"/>
+          <p:cNvPr id="32" name="직사각형 31">
+            <a:extLst>
+              <a:ext uri="{FF2B5EF4-FFF2-40B4-BE49-F238E27FC236}">
+                <a16:creationId xmlns:a16="http://schemas.microsoft.com/office/drawing/2014/main" id="{7A58CB89-58E3-410E-6B69-9D1E40DB6D6C}"/>
               </a:ext>
             </a:extLst>
           </p:cNvPr>
@@ -5109,8 +5266,8 @@
         </p:nvSpPr>
         <p:spPr>
           <a:xfrm>
-            <a:off x="8363046" y="1712934"/>
-            <a:ext cx="1678818" cy="541752"/>
+            <a:off x="2150136" y="3995803"/>
+            <a:ext cx="1557568" cy="541752"/>
           </a:xfrm>
           <a:prstGeom prst="rect">
             <a:avLst/>
@@ -5142,17 +5299,17 @@
             <a:pPr algn="ctr"/>
             <a:r>
               <a:rPr lang="ko-KR" altLang="en-US" dirty="0"/>
-              <a:t>무기 이름</a:t>
-            </a:r>
-          </a:p>
-        </p:txBody>
-      </p:sp>
-      <p:sp>
-        <p:nvSpPr>
-          <p:cNvPr id="26" name="직사각형 25">
-            <a:extLst>
-              <a:ext uri="{FF2B5EF4-FFF2-40B4-BE49-F238E27FC236}">
-                <a16:creationId xmlns:a16="http://schemas.microsoft.com/office/drawing/2014/main" id="{5788C168-9549-894B-3BD2-3F3F3859EEC8}"/>
+              <a:t>유파 이름</a:t>
+            </a:r>
+          </a:p>
+        </p:txBody>
+      </p:sp>
+      <p:sp>
+        <p:nvSpPr>
+          <p:cNvPr id="33" name="직사각형 32">
+            <a:extLst>
+              <a:ext uri="{FF2B5EF4-FFF2-40B4-BE49-F238E27FC236}">
+                <a16:creationId xmlns:a16="http://schemas.microsoft.com/office/drawing/2014/main" id="{480300DD-2AE6-D830-888C-3AAA488DE750}"/>
               </a:ext>
             </a:extLst>
           </p:cNvPr>
@@ -5161,15 +5318,12 @@
         </p:nvSpPr>
         <p:spPr>
           <a:xfrm>
-            <a:off x="7711692" y="2254686"/>
-            <a:ext cx="2330172" cy="1240076"/>
+            <a:off x="1498782" y="4866360"/>
+            <a:ext cx="2158242" cy="313152"/>
           </a:xfrm>
           <a:prstGeom prst="rect">
             <a:avLst/>
           </a:prstGeom>
-          <a:ln>
-            <a:noFill/>
-          </a:ln>
         </p:spPr>
         <p:style>
           <a:lnRef idx="2">
@@ -5191,48 +5345,17 @@
           <a:bodyPr rtlCol="0" anchor="ctr"/>
           <a:lstStyle/>
           <a:p>
-            <a:pPr algn="just"/>
-            <a:r>
-              <a:rPr lang="ko-KR" altLang="en-US" sz="1400" dirty="0"/>
-              <a:t>능력치 이름 </a:t>
-            </a:r>
-            <a:r>
-              <a:rPr lang="en-US" altLang="ko-KR" sz="1400" dirty="0"/>
-              <a:t>: + 100</a:t>
-            </a:r>
-          </a:p>
-          <a:p>
-            <a:pPr algn="just"/>
-            <a:r>
-              <a:rPr lang="ko-KR" altLang="en-US" sz="1400" dirty="0"/>
-              <a:t>능력치 이름 </a:t>
-            </a:r>
-            <a:r>
-              <a:rPr lang="en-US" altLang="ko-KR" sz="1400" dirty="0"/>
-              <a:t>: + 100</a:t>
-            </a:r>
-            <a:endParaRPr lang="ko-KR" altLang="en-US" sz="1400" dirty="0"/>
-          </a:p>
-          <a:p>
-            <a:pPr algn="just"/>
-            <a:r>
-              <a:rPr lang="ko-KR" altLang="en-US" sz="1400" dirty="0"/>
-              <a:t>능력치 이름 </a:t>
-            </a:r>
-            <a:r>
-              <a:rPr lang="en-US" altLang="ko-KR" sz="1400" dirty="0"/>
-              <a:t>: + 100</a:t>
-            </a:r>
-            <a:endParaRPr lang="ko-KR" altLang="en-US" sz="1400" dirty="0"/>
-          </a:p>
-        </p:txBody>
-      </p:sp>
-      <p:sp>
-        <p:nvSpPr>
-          <p:cNvPr id="27" name="직사각형 26">
-            <a:extLst>
-              <a:ext uri="{FF2B5EF4-FFF2-40B4-BE49-F238E27FC236}">
-                <a16:creationId xmlns:a16="http://schemas.microsoft.com/office/drawing/2014/main" id="{1BCB6131-41DF-6A76-EF41-51476D68F088}"/>
+            <a:pPr algn="ctr"/>
+            <a:endParaRPr lang="ko-KR" altLang="en-US" dirty="0"/>
+          </a:p>
+        </p:txBody>
+      </p:sp>
+      <p:sp>
+        <p:nvSpPr>
+          <p:cNvPr id="34" name="직사각형 33">
+            <a:extLst>
+              <a:ext uri="{FF2B5EF4-FFF2-40B4-BE49-F238E27FC236}">
+                <a16:creationId xmlns:a16="http://schemas.microsoft.com/office/drawing/2014/main" id="{83FE638E-2E15-94CA-3D72-AD10AF7131B9}"/>
               </a:ext>
             </a:extLst>
           </p:cNvPr>
@@ -5241,15 +5364,12 @@
         </p:nvSpPr>
         <p:spPr>
           <a:xfrm>
-            <a:off x="7711692" y="3494762"/>
-            <a:ext cx="2330172" cy="1240076"/>
+            <a:off x="1498782" y="5239008"/>
+            <a:ext cx="2158242" cy="313152"/>
           </a:xfrm>
           <a:prstGeom prst="rect">
             <a:avLst/>
           </a:prstGeom>
-          <a:ln>
-            <a:noFill/>
-          </a:ln>
         </p:spPr>
         <p:style>
           <a:lnRef idx="2">
@@ -5271,20 +5391,17 @@
           <a:bodyPr rtlCol="0" anchor="ctr"/>
           <a:lstStyle/>
           <a:p>
-            <a:pPr algn="just"/>
-            <a:r>
-              <a:rPr lang="ko-KR" altLang="en-US" sz="1400" dirty="0"/>
-              <a:t>대충 설명 대충 설명 대충 설명 대충 설명 대충 설명 대충 설명 대충 설명 대충 설명 대충 설명 대충 설명 대충 설명 대충 설명 </a:t>
-            </a:r>
-          </a:p>
-        </p:txBody>
-      </p:sp>
-      <p:sp>
-        <p:nvSpPr>
-          <p:cNvPr id="28" name="직사각형 27">
-            <a:extLst>
-              <a:ext uri="{FF2B5EF4-FFF2-40B4-BE49-F238E27FC236}">
-                <a16:creationId xmlns:a16="http://schemas.microsoft.com/office/drawing/2014/main" id="{8C332B88-575D-3767-2D10-1B5B84932357}"/>
+            <a:pPr algn="ctr"/>
+            <a:endParaRPr lang="ko-KR" altLang="en-US" dirty="0"/>
+          </a:p>
+        </p:txBody>
+      </p:sp>
+      <p:sp>
+        <p:nvSpPr>
+          <p:cNvPr id="35" name="직사각형 34">
+            <a:extLst>
+              <a:ext uri="{FF2B5EF4-FFF2-40B4-BE49-F238E27FC236}">
+                <a16:creationId xmlns:a16="http://schemas.microsoft.com/office/drawing/2014/main" id="{5CE22937-575C-C029-01B1-44C0AF84A82A}"/>
               </a:ext>
             </a:extLst>
           </p:cNvPr>
@@ -5293,8 +5410,8 @@
         </p:nvSpPr>
         <p:spPr>
           <a:xfrm>
-            <a:off x="7711692" y="5815208"/>
-            <a:ext cx="743376" cy="430582"/>
+            <a:off x="1498782" y="5611656"/>
+            <a:ext cx="2158242" cy="313152"/>
           </a:xfrm>
           <a:prstGeom prst="rect">
             <a:avLst/>
@@ -5321,6 +5438,377 @@
           <a:lstStyle/>
           <a:p>
             <a:pPr algn="ctr"/>
+            <a:endParaRPr lang="ko-KR" altLang="en-US" dirty="0"/>
+          </a:p>
+        </p:txBody>
+      </p:sp>
+      <p:sp>
+        <p:nvSpPr>
+          <p:cNvPr id="36" name="직사각형 35">
+            <a:extLst>
+              <a:ext uri="{FF2B5EF4-FFF2-40B4-BE49-F238E27FC236}">
+                <a16:creationId xmlns:a16="http://schemas.microsoft.com/office/drawing/2014/main" id="{C9EEEE43-C596-B4DA-0FE8-DD381EC9A14C}"/>
+              </a:ext>
+            </a:extLst>
+          </p:cNvPr>
+          <p:cNvSpPr/>
+          <p:nvPr/>
+        </p:nvSpPr>
+        <p:spPr>
+          <a:xfrm>
+            <a:off x="1498782" y="5984304"/>
+            <a:ext cx="2158242" cy="313152"/>
+          </a:xfrm>
+          <a:prstGeom prst="rect">
+            <a:avLst/>
+          </a:prstGeom>
+        </p:spPr>
+        <p:style>
+          <a:lnRef idx="2">
+            <a:schemeClr val="accent3">
+              <a:shade val="15000"/>
+            </a:schemeClr>
+          </a:lnRef>
+          <a:fillRef idx="1">
+            <a:schemeClr val="accent3"/>
+          </a:fillRef>
+          <a:effectRef idx="0">
+            <a:schemeClr val="accent3"/>
+          </a:effectRef>
+          <a:fontRef idx="minor">
+            <a:schemeClr val="lt1"/>
+          </a:fontRef>
+        </p:style>
+        <p:txBody>
+          <a:bodyPr rtlCol="0" anchor="ctr"/>
+          <a:lstStyle/>
+          <a:p>
+            <a:pPr algn="ctr"/>
+            <a:endParaRPr lang="ko-KR" altLang="en-US" dirty="0"/>
+          </a:p>
+        </p:txBody>
+      </p:sp>
+      <p:sp>
+        <p:nvSpPr>
+          <p:cNvPr id="39" name="직사각형 38">
+            <a:extLst>
+              <a:ext uri="{FF2B5EF4-FFF2-40B4-BE49-F238E27FC236}">
+                <a16:creationId xmlns:a16="http://schemas.microsoft.com/office/drawing/2014/main" id="{AA0134DE-FF1F-378B-7670-C45EC197D03F}"/>
+              </a:ext>
+            </a:extLst>
+          </p:cNvPr>
+          <p:cNvSpPr/>
+          <p:nvPr/>
+        </p:nvSpPr>
+        <p:spPr>
+          <a:xfrm>
+            <a:off x="3989540" y="4708785"/>
+            <a:ext cx="3475972" cy="1671974"/>
+          </a:xfrm>
+          <a:prstGeom prst="rect">
+            <a:avLst/>
+          </a:prstGeom>
+        </p:spPr>
+        <p:style>
+          <a:lnRef idx="2">
+            <a:schemeClr val="accent3">
+              <a:shade val="15000"/>
+            </a:schemeClr>
+          </a:lnRef>
+          <a:fillRef idx="1">
+            <a:schemeClr val="accent3"/>
+          </a:fillRef>
+          <a:effectRef idx="0">
+            <a:schemeClr val="accent3"/>
+          </a:effectRef>
+          <a:fontRef idx="minor">
+            <a:schemeClr val="lt1"/>
+          </a:fontRef>
+        </p:style>
+        <p:txBody>
+          <a:bodyPr rtlCol="0" anchor="ctr"/>
+          <a:lstStyle/>
+          <a:p>
+            <a:pPr algn="ctr"/>
+            <a:endParaRPr lang="en-US" altLang="ko-KR" dirty="0"/>
+          </a:p>
+        </p:txBody>
+      </p:sp>
+      <p:sp>
+        <p:nvSpPr>
+          <p:cNvPr id="40" name="직사각형 39">
+            <a:extLst>
+              <a:ext uri="{FF2B5EF4-FFF2-40B4-BE49-F238E27FC236}">
+                <a16:creationId xmlns:a16="http://schemas.microsoft.com/office/drawing/2014/main" id="{063D44F7-77FC-0DEE-0792-29B603599A02}"/>
+              </a:ext>
+            </a:extLst>
+          </p:cNvPr>
+          <p:cNvSpPr/>
+          <p:nvPr/>
+        </p:nvSpPr>
+        <p:spPr>
+          <a:xfrm>
+            <a:off x="4122225" y="4753531"/>
+            <a:ext cx="468001" cy="468000"/>
+          </a:xfrm>
+          <a:prstGeom prst="rect">
+            <a:avLst/>
+          </a:prstGeom>
+          <a:solidFill>
+            <a:schemeClr val="bg1">
+              <a:lumMod val="75000"/>
+            </a:schemeClr>
+          </a:solidFill>
+        </p:spPr>
+        <p:style>
+          <a:lnRef idx="2">
+            <a:schemeClr val="accent3">
+              <a:shade val="15000"/>
+            </a:schemeClr>
+          </a:lnRef>
+          <a:fillRef idx="1">
+            <a:schemeClr val="accent3"/>
+          </a:fillRef>
+          <a:effectRef idx="0">
+            <a:schemeClr val="accent3"/>
+          </a:effectRef>
+          <a:fontRef idx="minor">
+            <a:schemeClr val="lt1"/>
+          </a:fontRef>
+        </p:style>
+        <p:txBody>
+          <a:bodyPr wrap="none" rtlCol="0" anchor="ctr"/>
+          <a:lstStyle/>
+          <a:p>
+            <a:pPr algn="ctr"/>
+            <a:r>
+              <a:rPr lang="en-US" altLang="ko-KR" dirty="0"/>
+              <a:t>Icon</a:t>
+            </a:r>
+            <a:endParaRPr lang="ko-KR" altLang="en-US" dirty="0"/>
+          </a:p>
+        </p:txBody>
+      </p:sp>
+      <p:sp>
+        <p:nvSpPr>
+          <p:cNvPr id="41" name="직사각형 40">
+            <a:extLst>
+              <a:ext uri="{FF2B5EF4-FFF2-40B4-BE49-F238E27FC236}">
+                <a16:creationId xmlns:a16="http://schemas.microsoft.com/office/drawing/2014/main" id="{DB6C07ED-2348-2D5B-37A5-B2D0F3CA82F3}"/>
+              </a:ext>
+            </a:extLst>
+          </p:cNvPr>
+          <p:cNvSpPr/>
+          <p:nvPr/>
+        </p:nvSpPr>
+        <p:spPr>
+          <a:xfrm>
+            <a:off x="4722911" y="4813626"/>
+            <a:ext cx="1459346" cy="345342"/>
+          </a:xfrm>
+          <a:prstGeom prst="rect">
+            <a:avLst/>
+          </a:prstGeom>
+          <a:noFill/>
+          <a:ln>
+            <a:noFill/>
+          </a:ln>
+        </p:spPr>
+        <p:style>
+          <a:lnRef idx="2">
+            <a:schemeClr val="accent3">
+              <a:shade val="15000"/>
+            </a:schemeClr>
+          </a:lnRef>
+          <a:fillRef idx="1">
+            <a:schemeClr val="accent3"/>
+          </a:fillRef>
+          <a:effectRef idx="0">
+            <a:schemeClr val="accent3"/>
+          </a:effectRef>
+          <a:fontRef idx="minor">
+            <a:schemeClr val="lt1"/>
+          </a:fontRef>
+        </p:style>
+        <p:txBody>
+          <a:bodyPr rtlCol="0" anchor="ctr"/>
+          <a:lstStyle/>
+          <a:p>
+            <a:r>
+              <a:rPr lang="ko-KR" altLang="en-US" dirty="0"/>
+              <a:t>무기 이름</a:t>
+            </a:r>
+          </a:p>
+        </p:txBody>
+      </p:sp>
+      <p:sp>
+        <p:nvSpPr>
+          <p:cNvPr id="42" name="직사각형 41">
+            <a:extLst>
+              <a:ext uri="{FF2B5EF4-FFF2-40B4-BE49-F238E27FC236}">
+                <a16:creationId xmlns:a16="http://schemas.microsoft.com/office/drawing/2014/main" id="{5788C168-9549-894B-3BD2-3F3F3859EEC8}"/>
+              </a:ext>
+            </a:extLst>
+          </p:cNvPr>
+          <p:cNvSpPr/>
+          <p:nvPr/>
+        </p:nvSpPr>
+        <p:spPr>
+          <a:xfrm>
+            <a:off x="4099321" y="5626231"/>
+            <a:ext cx="3247954" cy="436843"/>
+          </a:xfrm>
+          <a:prstGeom prst="rect">
+            <a:avLst/>
+          </a:prstGeom>
+          <a:noFill/>
+          <a:ln>
+            <a:noFill/>
+          </a:ln>
+        </p:spPr>
+        <p:style>
+          <a:lnRef idx="2">
+            <a:schemeClr val="accent3">
+              <a:shade val="15000"/>
+            </a:schemeClr>
+          </a:lnRef>
+          <a:fillRef idx="1">
+            <a:schemeClr val="accent3"/>
+          </a:fillRef>
+          <a:effectRef idx="0">
+            <a:schemeClr val="accent3"/>
+          </a:effectRef>
+          <a:fontRef idx="minor">
+            <a:schemeClr val="lt1"/>
+          </a:fontRef>
+        </p:style>
+        <p:txBody>
+          <a:bodyPr rtlCol="0" anchor="ctr"/>
+          <a:lstStyle/>
+          <a:p>
+            <a:pPr algn="just"/>
+            <a:r>
+              <a:rPr lang="ko-KR" altLang="en-US" sz="1100" dirty="0"/>
+              <a:t>능력치 이름 </a:t>
+            </a:r>
+            <a:r>
+              <a:rPr lang="en-US" altLang="ko-KR" sz="1100"/>
+              <a:t>: + 100</a:t>
+            </a:r>
+          </a:p>
+          <a:p>
+            <a:pPr algn="just"/>
+            <a:r>
+              <a:rPr lang="ko-KR" altLang="en-US" sz="1100"/>
+              <a:t>능력치 </a:t>
+            </a:r>
+            <a:r>
+              <a:rPr lang="ko-KR" altLang="en-US" sz="1100" dirty="0"/>
+              <a:t>이름 </a:t>
+            </a:r>
+            <a:r>
+              <a:rPr lang="en-US" altLang="ko-KR" sz="1100"/>
+              <a:t>: + 100</a:t>
+            </a:r>
+            <a:endParaRPr lang="ko-KR" altLang="en-US" sz="1100" dirty="0"/>
+          </a:p>
+        </p:txBody>
+      </p:sp>
+      <p:sp>
+        <p:nvSpPr>
+          <p:cNvPr id="43" name="직사각형 42">
+            <a:extLst>
+              <a:ext uri="{FF2B5EF4-FFF2-40B4-BE49-F238E27FC236}">
+                <a16:creationId xmlns:a16="http://schemas.microsoft.com/office/drawing/2014/main" id="{1BCB6131-41DF-6A76-EF41-51476D68F088}"/>
+              </a:ext>
+            </a:extLst>
+          </p:cNvPr>
+          <p:cNvSpPr/>
+          <p:nvPr/>
+        </p:nvSpPr>
+        <p:spPr>
+          <a:xfrm>
+            <a:off x="4099321" y="5259177"/>
+            <a:ext cx="3225051" cy="432181"/>
+          </a:xfrm>
+          <a:prstGeom prst="rect">
+            <a:avLst/>
+          </a:prstGeom>
+          <a:noFill/>
+          <a:ln>
+            <a:noFill/>
+          </a:ln>
+        </p:spPr>
+        <p:style>
+          <a:lnRef idx="2">
+            <a:schemeClr val="accent3">
+              <a:shade val="15000"/>
+            </a:schemeClr>
+          </a:lnRef>
+          <a:fillRef idx="1">
+            <a:schemeClr val="accent3"/>
+          </a:fillRef>
+          <a:effectRef idx="0">
+            <a:schemeClr val="accent3"/>
+          </a:effectRef>
+          <a:fontRef idx="minor">
+            <a:schemeClr val="lt1"/>
+          </a:fontRef>
+        </p:style>
+        <p:txBody>
+          <a:bodyPr rtlCol="0" anchor="ctr"/>
+          <a:lstStyle/>
+          <a:p>
+            <a:pPr algn="just"/>
+            <a:r>
+              <a:rPr lang="ko-KR" altLang="en-US" sz="1400" dirty="0"/>
+              <a:t>짧은 설명</a:t>
+            </a:r>
+          </a:p>
+        </p:txBody>
+      </p:sp>
+      <p:sp>
+        <p:nvSpPr>
+          <p:cNvPr id="44" name="직사각형 43">
+            <a:extLst>
+              <a:ext uri="{FF2B5EF4-FFF2-40B4-BE49-F238E27FC236}">
+                <a16:creationId xmlns:a16="http://schemas.microsoft.com/office/drawing/2014/main" id="{8C332B88-575D-3767-2D10-1B5B84932357}"/>
+              </a:ext>
+            </a:extLst>
+          </p:cNvPr>
+          <p:cNvSpPr/>
+          <p:nvPr/>
+        </p:nvSpPr>
+        <p:spPr>
+          <a:xfrm>
+            <a:off x="4122224" y="6130837"/>
+            <a:ext cx="1028862" cy="202447"/>
+          </a:xfrm>
+          <a:prstGeom prst="rect">
+            <a:avLst/>
+          </a:prstGeom>
+        </p:spPr>
+        <p:style>
+          <a:lnRef idx="2">
+            <a:schemeClr val="accent3">
+              <a:shade val="15000"/>
+            </a:schemeClr>
+          </a:lnRef>
+          <a:fillRef idx="1">
+            <a:schemeClr val="accent3"/>
+          </a:fillRef>
+          <a:effectRef idx="0">
+            <a:schemeClr val="accent3"/>
+          </a:effectRef>
+          <a:fontRef idx="minor">
+            <a:schemeClr val="lt1"/>
+          </a:fontRef>
+        </p:style>
+        <p:txBody>
+          <a:bodyPr rtlCol="0" anchor="ctr"/>
+          <a:lstStyle/>
+          <a:p>
+            <a:pPr algn="ctr"/>
             <a:r>
               <a:rPr lang="ko-KR" altLang="en-US" sz="1000" dirty="0"/>
               <a:t>장착 해제</a:t>
@@ -5330,7 +5818,7 @@
       </p:sp>
       <p:sp>
         <p:nvSpPr>
-          <p:cNvPr id="29" name="직사각형 28">
+          <p:cNvPr id="45" name="직사각형 44">
             <a:extLst>
               <a:ext uri="{FF2B5EF4-FFF2-40B4-BE49-F238E27FC236}">
                 <a16:creationId xmlns:a16="http://schemas.microsoft.com/office/drawing/2014/main" id="{3EDF009F-D1C1-320A-0E8E-5535B7289E86}"/>
@@ -5342,8 +5830,8 @@
         </p:nvSpPr>
         <p:spPr>
           <a:xfrm>
-            <a:off x="8499871" y="5815208"/>
-            <a:ext cx="743376" cy="430582"/>
+            <a:off x="5213095" y="6130837"/>
+            <a:ext cx="1028862" cy="202447"/>
           </a:xfrm>
           <a:prstGeom prst="rect">
             <a:avLst/>
@@ -5385,7 +5873,7 @@
       </p:sp>
       <p:sp>
         <p:nvSpPr>
-          <p:cNvPr id="30" name="직사각형 29">
+          <p:cNvPr id="46" name="직사각형 45">
             <a:extLst>
               <a:ext uri="{FF2B5EF4-FFF2-40B4-BE49-F238E27FC236}">
                 <a16:creationId xmlns:a16="http://schemas.microsoft.com/office/drawing/2014/main" id="{3EE3A3BF-240D-369B-6BB3-D8722D0E1C4C}"/>
@@ -5397,8 +5885,8 @@
         </p:nvSpPr>
         <p:spPr>
           <a:xfrm>
-            <a:off x="9288050" y="5815208"/>
-            <a:ext cx="743376" cy="430582"/>
+            <a:off x="6303966" y="6130837"/>
+            <a:ext cx="1028862" cy="202447"/>
           </a:xfrm>
           <a:prstGeom prst="rect">
             <a:avLst/>
@@ -5463,10 +5951,10 @@
       </p:sp>
       <p:sp>
         <p:nvSpPr>
-          <p:cNvPr id="31" name="직사각형 30">
-            <a:extLst>
-              <a:ext uri="{FF2B5EF4-FFF2-40B4-BE49-F238E27FC236}">
-                <a16:creationId xmlns:a16="http://schemas.microsoft.com/office/drawing/2014/main" id="{D6BF24F3-46C5-3F93-552A-12BE9C777852}"/>
+          <p:cNvPr id="48" name="직사각형 47">
+            <a:extLst>
+              <a:ext uri="{FF2B5EF4-FFF2-40B4-BE49-F238E27FC236}">
+                <a16:creationId xmlns:a16="http://schemas.microsoft.com/office/drawing/2014/main" id="{99B7FFE3-75E9-3EAC-83F9-7A889D8705A4}"/>
               </a:ext>
             </a:extLst>
           </p:cNvPr>
@@ -5475,12 +5963,17 @@
         </p:nvSpPr>
         <p:spPr>
           <a:xfrm>
-            <a:off x="1498782" y="3995803"/>
+            <a:off x="4073262" y="1652651"/>
             <a:ext cx="565925" cy="541752"/>
           </a:xfrm>
           <a:prstGeom prst="rect">
             <a:avLst/>
           </a:prstGeom>
+          <a:solidFill>
+            <a:schemeClr val="bg1">
+              <a:lumMod val="75000"/>
+            </a:schemeClr>
+          </a:solidFill>
         </p:spPr>
         <p:style>
           <a:lnRef idx="2">
@@ -5499,6 +5992,872 @@
           </a:fontRef>
         </p:style>
         <p:txBody>
+          <a:bodyPr wrap="none" rtlCol="0" anchor="ctr"/>
+          <a:lstStyle/>
+          <a:p>
+            <a:pPr algn="ctr"/>
+            <a:r>
+              <a:rPr lang="en-US" altLang="ko-KR" dirty="0"/>
+              <a:t>Icon</a:t>
+            </a:r>
+            <a:endParaRPr lang="ko-KR" altLang="en-US" dirty="0"/>
+          </a:p>
+        </p:txBody>
+      </p:sp>
+      <p:sp>
+        <p:nvSpPr>
+          <p:cNvPr id="49" name="직사각형 48">
+            <a:extLst>
+              <a:ext uri="{FF2B5EF4-FFF2-40B4-BE49-F238E27FC236}">
+                <a16:creationId xmlns:a16="http://schemas.microsoft.com/office/drawing/2014/main" id="{BB44E765-F6BD-8C2D-EEC2-4A686C35B8E8}"/>
+              </a:ext>
+            </a:extLst>
+          </p:cNvPr>
+          <p:cNvSpPr/>
+          <p:nvPr/>
+        </p:nvSpPr>
+        <p:spPr>
+          <a:xfrm>
+            <a:off x="4755619" y="1652651"/>
+            <a:ext cx="565925" cy="541752"/>
+          </a:xfrm>
+          <a:prstGeom prst="rect">
+            <a:avLst/>
+          </a:prstGeom>
+          <a:solidFill>
+            <a:schemeClr val="bg1">
+              <a:lumMod val="75000"/>
+            </a:schemeClr>
+          </a:solidFill>
+        </p:spPr>
+        <p:style>
+          <a:lnRef idx="2">
+            <a:schemeClr val="accent3">
+              <a:shade val="15000"/>
+            </a:schemeClr>
+          </a:lnRef>
+          <a:fillRef idx="1">
+            <a:schemeClr val="accent3"/>
+          </a:fillRef>
+          <a:effectRef idx="0">
+            <a:schemeClr val="accent3"/>
+          </a:effectRef>
+          <a:fontRef idx="minor">
+            <a:schemeClr val="lt1"/>
+          </a:fontRef>
+        </p:style>
+        <p:txBody>
+          <a:bodyPr wrap="none" rtlCol="0" anchor="ctr"/>
+          <a:lstStyle/>
+          <a:p>
+            <a:pPr algn="ctr"/>
+            <a:r>
+              <a:rPr lang="en-US" altLang="ko-KR" dirty="0"/>
+              <a:t>Icon</a:t>
+            </a:r>
+            <a:endParaRPr lang="ko-KR" altLang="en-US" dirty="0"/>
+          </a:p>
+        </p:txBody>
+      </p:sp>
+      <p:sp>
+        <p:nvSpPr>
+          <p:cNvPr id="50" name="직사각형 49">
+            <a:extLst>
+              <a:ext uri="{FF2B5EF4-FFF2-40B4-BE49-F238E27FC236}">
+                <a16:creationId xmlns:a16="http://schemas.microsoft.com/office/drawing/2014/main" id="{7C7B1857-784A-2B02-FED8-74573294BAC9}"/>
+              </a:ext>
+            </a:extLst>
+          </p:cNvPr>
+          <p:cNvSpPr/>
+          <p:nvPr/>
+        </p:nvSpPr>
+        <p:spPr>
+          <a:xfrm>
+            <a:off x="5437976" y="1652651"/>
+            <a:ext cx="565925" cy="541752"/>
+          </a:xfrm>
+          <a:prstGeom prst="rect">
+            <a:avLst/>
+          </a:prstGeom>
+          <a:solidFill>
+            <a:schemeClr val="bg1">
+              <a:lumMod val="75000"/>
+            </a:schemeClr>
+          </a:solidFill>
+        </p:spPr>
+        <p:style>
+          <a:lnRef idx="2">
+            <a:schemeClr val="accent3">
+              <a:shade val="15000"/>
+            </a:schemeClr>
+          </a:lnRef>
+          <a:fillRef idx="1">
+            <a:schemeClr val="accent3"/>
+          </a:fillRef>
+          <a:effectRef idx="0">
+            <a:schemeClr val="accent3"/>
+          </a:effectRef>
+          <a:fontRef idx="minor">
+            <a:schemeClr val="lt1"/>
+          </a:fontRef>
+        </p:style>
+        <p:txBody>
+          <a:bodyPr wrap="none" rtlCol="0" anchor="ctr"/>
+          <a:lstStyle/>
+          <a:p>
+            <a:pPr algn="ctr"/>
+            <a:r>
+              <a:rPr lang="en-US" altLang="ko-KR" dirty="0"/>
+              <a:t>Icon</a:t>
+            </a:r>
+            <a:endParaRPr lang="ko-KR" altLang="en-US" dirty="0"/>
+          </a:p>
+        </p:txBody>
+      </p:sp>
+      <p:sp>
+        <p:nvSpPr>
+          <p:cNvPr id="51" name="직사각형 50">
+            <a:extLst>
+              <a:ext uri="{FF2B5EF4-FFF2-40B4-BE49-F238E27FC236}">
+                <a16:creationId xmlns:a16="http://schemas.microsoft.com/office/drawing/2014/main" id="{8C68E0CE-D7ED-C2C8-C160-63C2D1286F45}"/>
+              </a:ext>
+            </a:extLst>
+          </p:cNvPr>
+          <p:cNvSpPr/>
+          <p:nvPr/>
+        </p:nvSpPr>
+        <p:spPr>
+          <a:xfrm>
+            <a:off x="6120333" y="1652651"/>
+            <a:ext cx="565925" cy="541752"/>
+          </a:xfrm>
+          <a:prstGeom prst="rect">
+            <a:avLst/>
+          </a:prstGeom>
+          <a:solidFill>
+            <a:schemeClr val="bg1">
+              <a:lumMod val="75000"/>
+            </a:schemeClr>
+          </a:solidFill>
+        </p:spPr>
+        <p:style>
+          <a:lnRef idx="2">
+            <a:schemeClr val="accent3">
+              <a:shade val="15000"/>
+            </a:schemeClr>
+          </a:lnRef>
+          <a:fillRef idx="1">
+            <a:schemeClr val="accent3"/>
+          </a:fillRef>
+          <a:effectRef idx="0">
+            <a:schemeClr val="accent3"/>
+          </a:effectRef>
+          <a:fontRef idx="minor">
+            <a:schemeClr val="lt1"/>
+          </a:fontRef>
+        </p:style>
+        <p:txBody>
+          <a:bodyPr wrap="none" rtlCol="0" anchor="ctr"/>
+          <a:lstStyle/>
+          <a:p>
+            <a:pPr algn="ctr"/>
+            <a:r>
+              <a:rPr lang="en-US" altLang="ko-KR" dirty="0"/>
+              <a:t>Icon</a:t>
+            </a:r>
+            <a:endParaRPr lang="ko-KR" altLang="en-US" dirty="0"/>
+          </a:p>
+        </p:txBody>
+      </p:sp>
+      <p:sp>
+        <p:nvSpPr>
+          <p:cNvPr id="52" name="직사각형 51">
+            <a:extLst>
+              <a:ext uri="{FF2B5EF4-FFF2-40B4-BE49-F238E27FC236}">
+                <a16:creationId xmlns:a16="http://schemas.microsoft.com/office/drawing/2014/main" id="{89790B82-655A-4690-4217-3593CF3F00CA}"/>
+              </a:ext>
+            </a:extLst>
+          </p:cNvPr>
+          <p:cNvSpPr/>
+          <p:nvPr/>
+        </p:nvSpPr>
+        <p:spPr>
+          <a:xfrm>
+            <a:off x="6807335" y="1652651"/>
+            <a:ext cx="565925" cy="541752"/>
+          </a:xfrm>
+          <a:prstGeom prst="rect">
+            <a:avLst/>
+          </a:prstGeom>
+          <a:solidFill>
+            <a:schemeClr val="bg1">
+              <a:lumMod val="75000"/>
+            </a:schemeClr>
+          </a:solidFill>
+        </p:spPr>
+        <p:style>
+          <a:lnRef idx="2">
+            <a:schemeClr val="accent3">
+              <a:shade val="15000"/>
+            </a:schemeClr>
+          </a:lnRef>
+          <a:fillRef idx="1">
+            <a:schemeClr val="accent3"/>
+          </a:fillRef>
+          <a:effectRef idx="0">
+            <a:schemeClr val="accent3"/>
+          </a:effectRef>
+          <a:fontRef idx="minor">
+            <a:schemeClr val="lt1"/>
+          </a:fontRef>
+        </p:style>
+        <p:txBody>
+          <a:bodyPr wrap="none" rtlCol="0" anchor="ctr"/>
+          <a:lstStyle/>
+          <a:p>
+            <a:pPr algn="ctr"/>
+            <a:r>
+              <a:rPr lang="en-US" altLang="ko-KR" dirty="0"/>
+              <a:t>Icon</a:t>
+            </a:r>
+            <a:endParaRPr lang="ko-KR" altLang="en-US" dirty="0"/>
+          </a:p>
+        </p:txBody>
+      </p:sp>
+      <p:sp>
+        <p:nvSpPr>
+          <p:cNvPr id="53" name="직사각형 52">
+            <a:extLst>
+              <a:ext uri="{FF2B5EF4-FFF2-40B4-BE49-F238E27FC236}">
+                <a16:creationId xmlns:a16="http://schemas.microsoft.com/office/drawing/2014/main" id="{FC3849F0-BB3F-8622-EBD3-8788BD6E3FD4}"/>
+              </a:ext>
+            </a:extLst>
+          </p:cNvPr>
+          <p:cNvSpPr/>
+          <p:nvPr/>
+        </p:nvSpPr>
+        <p:spPr>
+          <a:xfrm>
+            <a:off x="4073262" y="2290581"/>
+            <a:ext cx="565925" cy="541752"/>
+          </a:xfrm>
+          <a:prstGeom prst="rect">
+            <a:avLst/>
+          </a:prstGeom>
+          <a:solidFill>
+            <a:schemeClr val="bg1">
+              <a:lumMod val="75000"/>
+            </a:schemeClr>
+          </a:solidFill>
+        </p:spPr>
+        <p:style>
+          <a:lnRef idx="2">
+            <a:schemeClr val="accent3">
+              <a:shade val="15000"/>
+            </a:schemeClr>
+          </a:lnRef>
+          <a:fillRef idx="1">
+            <a:schemeClr val="accent3"/>
+          </a:fillRef>
+          <a:effectRef idx="0">
+            <a:schemeClr val="accent3"/>
+          </a:effectRef>
+          <a:fontRef idx="minor">
+            <a:schemeClr val="lt1"/>
+          </a:fontRef>
+        </p:style>
+        <p:txBody>
+          <a:bodyPr wrap="none" rtlCol="0" anchor="ctr"/>
+          <a:lstStyle/>
+          <a:p>
+            <a:pPr algn="ctr"/>
+            <a:r>
+              <a:rPr lang="en-US" altLang="ko-KR" dirty="0"/>
+              <a:t>Icon</a:t>
+            </a:r>
+            <a:endParaRPr lang="ko-KR" altLang="en-US" dirty="0"/>
+          </a:p>
+        </p:txBody>
+      </p:sp>
+      <p:sp>
+        <p:nvSpPr>
+          <p:cNvPr id="54" name="직사각형 53">
+            <a:extLst>
+              <a:ext uri="{FF2B5EF4-FFF2-40B4-BE49-F238E27FC236}">
+                <a16:creationId xmlns:a16="http://schemas.microsoft.com/office/drawing/2014/main" id="{C95B582E-B362-D52C-BAE3-9384086018E8}"/>
+              </a:ext>
+            </a:extLst>
+          </p:cNvPr>
+          <p:cNvSpPr/>
+          <p:nvPr/>
+        </p:nvSpPr>
+        <p:spPr>
+          <a:xfrm>
+            <a:off x="4755619" y="2290581"/>
+            <a:ext cx="565925" cy="541752"/>
+          </a:xfrm>
+          <a:prstGeom prst="rect">
+            <a:avLst/>
+          </a:prstGeom>
+          <a:solidFill>
+            <a:schemeClr val="bg1">
+              <a:lumMod val="75000"/>
+            </a:schemeClr>
+          </a:solidFill>
+        </p:spPr>
+        <p:style>
+          <a:lnRef idx="2">
+            <a:schemeClr val="accent3">
+              <a:shade val="15000"/>
+            </a:schemeClr>
+          </a:lnRef>
+          <a:fillRef idx="1">
+            <a:schemeClr val="accent3"/>
+          </a:fillRef>
+          <a:effectRef idx="0">
+            <a:schemeClr val="accent3"/>
+          </a:effectRef>
+          <a:fontRef idx="minor">
+            <a:schemeClr val="lt1"/>
+          </a:fontRef>
+        </p:style>
+        <p:txBody>
+          <a:bodyPr wrap="none" rtlCol="0" anchor="ctr"/>
+          <a:lstStyle/>
+          <a:p>
+            <a:pPr algn="ctr"/>
+            <a:r>
+              <a:rPr lang="en-US" altLang="ko-KR" dirty="0"/>
+              <a:t>Icon</a:t>
+            </a:r>
+            <a:endParaRPr lang="ko-KR" altLang="en-US" dirty="0"/>
+          </a:p>
+        </p:txBody>
+      </p:sp>
+      <p:sp>
+        <p:nvSpPr>
+          <p:cNvPr id="55" name="직사각형 54">
+            <a:extLst>
+              <a:ext uri="{FF2B5EF4-FFF2-40B4-BE49-F238E27FC236}">
+                <a16:creationId xmlns:a16="http://schemas.microsoft.com/office/drawing/2014/main" id="{E59425DA-3522-9910-84F7-6E36CCEADB70}"/>
+              </a:ext>
+            </a:extLst>
+          </p:cNvPr>
+          <p:cNvSpPr/>
+          <p:nvPr/>
+        </p:nvSpPr>
+        <p:spPr>
+          <a:xfrm>
+            <a:off x="5437976" y="2290581"/>
+            <a:ext cx="565925" cy="541752"/>
+          </a:xfrm>
+          <a:prstGeom prst="rect">
+            <a:avLst/>
+          </a:prstGeom>
+          <a:solidFill>
+            <a:schemeClr val="bg1">
+              <a:lumMod val="75000"/>
+            </a:schemeClr>
+          </a:solidFill>
+        </p:spPr>
+        <p:style>
+          <a:lnRef idx="2">
+            <a:schemeClr val="accent3">
+              <a:shade val="15000"/>
+            </a:schemeClr>
+          </a:lnRef>
+          <a:fillRef idx="1">
+            <a:schemeClr val="accent3"/>
+          </a:fillRef>
+          <a:effectRef idx="0">
+            <a:schemeClr val="accent3"/>
+          </a:effectRef>
+          <a:fontRef idx="minor">
+            <a:schemeClr val="lt1"/>
+          </a:fontRef>
+        </p:style>
+        <p:txBody>
+          <a:bodyPr wrap="none" rtlCol="0" anchor="ctr"/>
+          <a:lstStyle/>
+          <a:p>
+            <a:pPr algn="ctr"/>
+            <a:r>
+              <a:rPr lang="en-US" altLang="ko-KR" dirty="0"/>
+              <a:t>Icon</a:t>
+            </a:r>
+            <a:endParaRPr lang="ko-KR" altLang="en-US" dirty="0"/>
+          </a:p>
+        </p:txBody>
+      </p:sp>
+      <p:sp>
+        <p:nvSpPr>
+          <p:cNvPr id="56" name="직사각형 55">
+            <a:extLst>
+              <a:ext uri="{FF2B5EF4-FFF2-40B4-BE49-F238E27FC236}">
+                <a16:creationId xmlns:a16="http://schemas.microsoft.com/office/drawing/2014/main" id="{025C063B-4C5D-A2B4-7742-DF4E54AA9709}"/>
+              </a:ext>
+            </a:extLst>
+          </p:cNvPr>
+          <p:cNvSpPr/>
+          <p:nvPr/>
+        </p:nvSpPr>
+        <p:spPr>
+          <a:xfrm>
+            <a:off x="6120333" y="2290581"/>
+            <a:ext cx="565925" cy="541752"/>
+          </a:xfrm>
+          <a:prstGeom prst="rect">
+            <a:avLst/>
+          </a:prstGeom>
+          <a:solidFill>
+            <a:schemeClr val="bg1">
+              <a:lumMod val="75000"/>
+            </a:schemeClr>
+          </a:solidFill>
+        </p:spPr>
+        <p:style>
+          <a:lnRef idx="2">
+            <a:schemeClr val="accent3">
+              <a:shade val="15000"/>
+            </a:schemeClr>
+          </a:lnRef>
+          <a:fillRef idx="1">
+            <a:schemeClr val="accent3"/>
+          </a:fillRef>
+          <a:effectRef idx="0">
+            <a:schemeClr val="accent3"/>
+          </a:effectRef>
+          <a:fontRef idx="minor">
+            <a:schemeClr val="lt1"/>
+          </a:fontRef>
+        </p:style>
+        <p:txBody>
+          <a:bodyPr wrap="none" rtlCol="0" anchor="ctr"/>
+          <a:lstStyle/>
+          <a:p>
+            <a:pPr algn="ctr"/>
+            <a:r>
+              <a:rPr lang="en-US" altLang="ko-KR" dirty="0"/>
+              <a:t>Icon</a:t>
+            </a:r>
+            <a:endParaRPr lang="ko-KR" altLang="en-US" dirty="0"/>
+          </a:p>
+        </p:txBody>
+      </p:sp>
+      <p:sp>
+        <p:nvSpPr>
+          <p:cNvPr id="57" name="직사각형 56">
+            <a:extLst>
+              <a:ext uri="{FF2B5EF4-FFF2-40B4-BE49-F238E27FC236}">
+                <a16:creationId xmlns:a16="http://schemas.microsoft.com/office/drawing/2014/main" id="{9DC67BCC-6DF4-13DF-A205-A9E0787B85B8}"/>
+              </a:ext>
+            </a:extLst>
+          </p:cNvPr>
+          <p:cNvSpPr/>
+          <p:nvPr/>
+        </p:nvSpPr>
+        <p:spPr>
+          <a:xfrm>
+            <a:off x="6807335" y="2290581"/>
+            <a:ext cx="565925" cy="541752"/>
+          </a:xfrm>
+          <a:prstGeom prst="rect">
+            <a:avLst/>
+          </a:prstGeom>
+          <a:solidFill>
+            <a:schemeClr val="bg1">
+              <a:lumMod val="75000"/>
+            </a:schemeClr>
+          </a:solidFill>
+        </p:spPr>
+        <p:style>
+          <a:lnRef idx="2">
+            <a:schemeClr val="accent3">
+              <a:shade val="15000"/>
+            </a:schemeClr>
+          </a:lnRef>
+          <a:fillRef idx="1">
+            <a:schemeClr val="accent3"/>
+          </a:fillRef>
+          <a:effectRef idx="0">
+            <a:schemeClr val="accent3"/>
+          </a:effectRef>
+          <a:fontRef idx="minor">
+            <a:schemeClr val="lt1"/>
+          </a:fontRef>
+        </p:style>
+        <p:txBody>
+          <a:bodyPr wrap="none" rtlCol="0" anchor="ctr"/>
+          <a:lstStyle/>
+          <a:p>
+            <a:pPr algn="ctr"/>
+            <a:r>
+              <a:rPr lang="en-US" altLang="ko-KR" dirty="0"/>
+              <a:t>Icon</a:t>
+            </a:r>
+            <a:endParaRPr lang="ko-KR" altLang="en-US" dirty="0"/>
+          </a:p>
+        </p:txBody>
+      </p:sp>
+      <p:sp>
+        <p:nvSpPr>
+          <p:cNvPr id="58" name="직사각형 57">
+            <a:extLst>
+              <a:ext uri="{FF2B5EF4-FFF2-40B4-BE49-F238E27FC236}">
+                <a16:creationId xmlns:a16="http://schemas.microsoft.com/office/drawing/2014/main" id="{22A1F528-550B-983F-3417-4E0A936603ED}"/>
+              </a:ext>
+            </a:extLst>
+          </p:cNvPr>
+          <p:cNvSpPr/>
+          <p:nvPr/>
+        </p:nvSpPr>
+        <p:spPr>
+          <a:xfrm>
+            <a:off x="4073262" y="2928511"/>
+            <a:ext cx="565925" cy="541752"/>
+          </a:xfrm>
+          <a:prstGeom prst="rect">
+            <a:avLst/>
+          </a:prstGeom>
+          <a:solidFill>
+            <a:schemeClr val="bg1">
+              <a:lumMod val="75000"/>
+            </a:schemeClr>
+          </a:solidFill>
+        </p:spPr>
+        <p:style>
+          <a:lnRef idx="2">
+            <a:schemeClr val="accent3">
+              <a:shade val="15000"/>
+            </a:schemeClr>
+          </a:lnRef>
+          <a:fillRef idx="1">
+            <a:schemeClr val="accent3"/>
+          </a:fillRef>
+          <a:effectRef idx="0">
+            <a:schemeClr val="accent3"/>
+          </a:effectRef>
+          <a:fontRef idx="minor">
+            <a:schemeClr val="lt1"/>
+          </a:fontRef>
+        </p:style>
+        <p:txBody>
+          <a:bodyPr wrap="none" rtlCol="0" anchor="ctr"/>
+          <a:lstStyle/>
+          <a:p>
+            <a:pPr algn="ctr"/>
+            <a:r>
+              <a:rPr lang="en-US" altLang="ko-KR" dirty="0"/>
+              <a:t>Icon</a:t>
+            </a:r>
+            <a:endParaRPr lang="ko-KR" altLang="en-US" dirty="0"/>
+          </a:p>
+        </p:txBody>
+      </p:sp>
+      <p:sp>
+        <p:nvSpPr>
+          <p:cNvPr id="59" name="직사각형 58">
+            <a:extLst>
+              <a:ext uri="{FF2B5EF4-FFF2-40B4-BE49-F238E27FC236}">
+                <a16:creationId xmlns:a16="http://schemas.microsoft.com/office/drawing/2014/main" id="{C338E3B6-A614-9300-A6DA-3CE0CD1589D7}"/>
+              </a:ext>
+            </a:extLst>
+          </p:cNvPr>
+          <p:cNvSpPr/>
+          <p:nvPr/>
+        </p:nvSpPr>
+        <p:spPr>
+          <a:xfrm>
+            <a:off x="4755619" y="2928511"/>
+            <a:ext cx="565925" cy="541752"/>
+          </a:xfrm>
+          <a:prstGeom prst="rect">
+            <a:avLst/>
+          </a:prstGeom>
+          <a:solidFill>
+            <a:schemeClr val="bg1">
+              <a:lumMod val="75000"/>
+            </a:schemeClr>
+          </a:solidFill>
+        </p:spPr>
+        <p:style>
+          <a:lnRef idx="2">
+            <a:schemeClr val="accent3">
+              <a:shade val="15000"/>
+            </a:schemeClr>
+          </a:lnRef>
+          <a:fillRef idx="1">
+            <a:schemeClr val="accent3"/>
+          </a:fillRef>
+          <a:effectRef idx="0">
+            <a:schemeClr val="accent3"/>
+          </a:effectRef>
+          <a:fontRef idx="minor">
+            <a:schemeClr val="lt1"/>
+          </a:fontRef>
+        </p:style>
+        <p:txBody>
+          <a:bodyPr wrap="none" rtlCol="0" anchor="ctr"/>
+          <a:lstStyle/>
+          <a:p>
+            <a:pPr algn="ctr"/>
+            <a:r>
+              <a:rPr lang="en-US" altLang="ko-KR" dirty="0"/>
+              <a:t>Icon</a:t>
+            </a:r>
+            <a:endParaRPr lang="ko-KR" altLang="en-US" dirty="0"/>
+          </a:p>
+        </p:txBody>
+      </p:sp>
+      <p:sp>
+        <p:nvSpPr>
+          <p:cNvPr id="60" name="직사각형 59">
+            <a:extLst>
+              <a:ext uri="{FF2B5EF4-FFF2-40B4-BE49-F238E27FC236}">
+                <a16:creationId xmlns:a16="http://schemas.microsoft.com/office/drawing/2014/main" id="{35E6680A-58CC-128A-1CA6-DFB25E2038B5}"/>
+              </a:ext>
+            </a:extLst>
+          </p:cNvPr>
+          <p:cNvSpPr/>
+          <p:nvPr/>
+        </p:nvSpPr>
+        <p:spPr>
+          <a:xfrm>
+            <a:off x="5437976" y="2928511"/>
+            <a:ext cx="565925" cy="541752"/>
+          </a:xfrm>
+          <a:prstGeom prst="rect">
+            <a:avLst/>
+          </a:prstGeom>
+          <a:solidFill>
+            <a:schemeClr val="bg1">
+              <a:lumMod val="75000"/>
+            </a:schemeClr>
+          </a:solidFill>
+        </p:spPr>
+        <p:style>
+          <a:lnRef idx="2">
+            <a:schemeClr val="accent3">
+              <a:shade val="15000"/>
+            </a:schemeClr>
+          </a:lnRef>
+          <a:fillRef idx="1">
+            <a:schemeClr val="accent3"/>
+          </a:fillRef>
+          <a:effectRef idx="0">
+            <a:schemeClr val="accent3"/>
+          </a:effectRef>
+          <a:fontRef idx="minor">
+            <a:schemeClr val="lt1"/>
+          </a:fontRef>
+        </p:style>
+        <p:txBody>
+          <a:bodyPr wrap="none" rtlCol="0" anchor="ctr"/>
+          <a:lstStyle/>
+          <a:p>
+            <a:pPr algn="ctr"/>
+            <a:r>
+              <a:rPr lang="en-US" altLang="ko-KR" dirty="0"/>
+              <a:t>Icon</a:t>
+            </a:r>
+            <a:endParaRPr lang="ko-KR" altLang="en-US" dirty="0"/>
+          </a:p>
+        </p:txBody>
+      </p:sp>
+      <p:sp>
+        <p:nvSpPr>
+          <p:cNvPr id="64" name="TextBox 63">
+            <a:extLst>
+              <a:ext uri="{FF2B5EF4-FFF2-40B4-BE49-F238E27FC236}">
+                <a16:creationId xmlns:a16="http://schemas.microsoft.com/office/drawing/2014/main" id="{8B1BF404-43AA-8277-DABE-20B0C856ACE1}"/>
+              </a:ext>
+            </a:extLst>
+          </p:cNvPr>
+          <p:cNvSpPr txBox="1"/>
+          <p:nvPr/>
+        </p:nvSpPr>
+        <p:spPr>
+          <a:xfrm>
+            <a:off x="1341589" y="473044"/>
+            <a:ext cx="6096000" cy="369332"/>
+          </a:xfrm>
+          <a:prstGeom prst="rect">
+            <a:avLst/>
+          </a:prstGeom>
+          <a:noFill/>
+        </p:spPr>
+        <p:txBody>
+          <a:bodyPr wrap="square">
+            <a:spAutoFit/>
+          </a:bodyPr>
+          <a:lstStyle/>
+          <a:p>
+            <a:r>
+              <a:rPr lang="en-US" altLang="ko-KR" dirty="0"/>
+              <a:t>※ </a:t>
+            </a:r>
+            <a:r>
+              <a:rPr lang="ko-KR" altLang="en-US" dirty="0"/>
+              <a:t>선택한 아이템의 상세 정보가 표시되는 상황</a:t>
+            </a:r>
+            <a:r>
+              <a:rPr lang="en-US" altLang="ko-KR" dirty="0"/>
+              <a:t>.</a:t>
+            </a:r>
+            <a:r>
+              <a:rPr lang="ko-KR" altLang="en-US" dirty="0"/>
+              <a:t> </a:t>
+            </a:r>
+          </a:p>
+        </p:txBody>
+      </p:sp>
+    </p:spTree>
+    <p:extLst>
+      <p:ext uri="{BB962C8B-B14F-4D97-AF65-F5344CB8AC3E}">
+        <p14:creationId xmlns:p14="http://schemas.microsoft.com/office/powerpoint/2010/main" val="792640323"/>
+      </p:ext>
+    </p:extLst>
+  </p:cSld>
+  <p:clrMapOvr>
+    <a:masterClrMapping/>
+  </p:clrMapOvr>
+</p:sld>
+</file>
+
+<file path=ppt/slides/slide3.xml><?xml version="1.0" encoding="utf-8"?>
+<p:sld xmlns:a="http://schemas.openxmlformats.org/drawingml/2006/main" xmlns:r="http://schemas.openxmlformats.org/officeDocument/2006/relationships" xmlns:p="http://schemas.openxmlformats.org/presentationml/2006/main">
+  <p:cSld>
+    <p:spTree>
+      <p:nvGrpSpPr>
+        <p:cNvPr id="1" name="">
+          <a:extLst>
+            <a:ext uri="{FF2B5EF4-FFF2-40B4-BE49-F238E27FC236}">
+              <a16:creationId xmlns:a16="http://schemas.microsoft.com/office/drawing/2014/main" id="{DB2FD4DB-5603-304A-9987-165DEFE065F7}"/>
+            </a:ext>
+          </a:extLst>
+        </p:cNvPr>
+        <p:cNvGrpSpPr/>
+        <p:nvPr/>
+      </p:nvGrpSpPr>
+      <p:grpSpPr>
+        <a:xfrm>
+          <a:off x="0" y="0"/>
+          <a:ext cx="0" cy="0"/>
+          <a:chOff x="0" y="0"/>
+          <a:chExt cx="0" cy="0"/>
+        </a:xfrm>
+      </p:grpSpPr>
+      <p:sp>
+        <p:nvSpPr>
+          <p:cNvPr id="38" name="직사각형 37">
+            <a:extLst>
+              <a:ext uri="{FF2B5EF4-FFF2-40B4-BE49-F238E27FC236}">
+                <a16:creationId xmlns:a16="http://schemas.microsoft.com/office/drawing/2014/main" id="{75A1C0C7-5203-4BE6-2366-41BAF941E65F}"/>
+              </a:ext>
+            </a:extLst>
+          </p:cNvPr>
+          <p:cNvSpPr/>
+          <p:nvPr/>
+        </p:nvSpPr>
+        <p:spPr>
+          <a:xfrm>
+            <a:off x="7615825" y="1584543"/>
+            <a:ext cx="2511468" cy="4797468"/>
+          </a:xfrm>
+          <a:prstGeom prst="rect">
+            <a:avLst/>
+          </a:prstGeom>
+        </p:spPr>
+        <p:style>
+          <a:lnRef idx="2">
+            <a:schemeClr val="accent3">
+              <a:shade val="15000"/>
+            </a:schemeClr>
+          </a:lnRef>
+          <a:fillRef idx="1">
+            <a:schemeClr val="accent3"/>
+          </a:fillRef>
+          <a:effectRef idx="0">
+            <a:schemeClr val="accent3"/>
+          </a:effectRef>
+          <a:fontRef idx="minor">
+            <a:schemeClr val="lt1"/>
+          </a:fontRef>
+        </p:style>
+        <p:txBody>
+          <a:bodyPr rtlCol="0" anchor="ctr"/>
+          <a:lstStyle/>
+          <a:p>
+            <a:pPr algn="ctr"/>
+            <a:r>
+              <a:rPr lang="ko-KR" altLang="en-US" dirty="0"/>
+              <a:t>캐릭터</a:t>
+            </a:r>
+            <a:endParaRPr lang="en-US" altLang="ko-KR" dirty="0"/>
+          </a:p>
+          <a:p>
+            <a:pPr algn="ctr"/>
+            <a:r>
+              <a:rPr lang="ko-KR" altLang="en-US" dirty="0" err="1"/>
+              <a:t>스테이터스</a:t>
+            </a:r>
+            <a:r>
+              <a:rPr lang="ko-KR" altLang="en-US" dirty="0"/>
+              <a:t> 정보</a:t>
+            </a:r>
+            <a:endParaRPr lang="en-US" altLang="ko-KR" dirty="0"/>
+          </a:p>
+          <a:p>
+            <a:pPr algn="ctr"/>
+            <a:endParaRPr lang="en-US" altLang="ko-KR" dirty="0"/>
+          </a:p>
+          <a:p>
+            <a:pPr algn="ctr"/>
+            <a:r>
+              <a:rPr lang="ko-KR" altLang="en-US" dirty="0"/>
+              <a:t>나중에 구현</a:t>
+            </a:r>
+          </a:p>
+        </p:txBody>
+      </p:sp>
+      <p:sp>
+        <p:nvSpPr>
+          <p:cNvPr id="4" name="직사각형 3">
+            <a:extLst>
+              <a:ext uri="{FF2B5EF4-FFF2-40B4-BE49-F238E27FC236}">
+                <a16:creationId xmlns:a16="http://schemas.microsoft.com/office/drawing/2014/main" id="{9BFE315F-E61F-F0BE-E8AA-7E4B16E01DA4}"/>
+              </a:ext>
+            </a:extLst>
+          </p:cNvPr>
+          <p:cNvSpPr/>
+          <p:nvPr/>
+        </p:nvSpPr>
+        <p:spPr>
+          <a:xfrm>
+            <a:off x="1346548" y="1584544"/>
+            <a:ext cx="2492679" cy="2210842"/>
+          </a:xfrm>
+          <a:prstGeom prst="rect">
+            <a:avLst/>
+          </a:prstGeom>
+        </p:spPr>
+        <p:style>
+          <a:lnRef idx="2">
+            <a:schemeClr val="accent3">
+              <a:shade val="15000"/>
+            </a:schemeClr>
+          </a:lnRef>
+          <a:fillRef idx="1">
+            <a:schemeClr val="accent3"/>
+          </a:fillRef>
+          <a:effectRef idx="0">
+            <a:schemeClr val="accent3"/>
+          </a:effectRef>
+          <a:fontRef idx="minor">
+            <a:schemeClr val="lt1"/>
+          </a:fontRef>
+        </p:style>
+        <p:txBody>
           <a:bodyPr rtlCol="0" anchor="ctr"/>
           <a:lstStyle/>
           <a:p>
@@ -5509,10 +6868,10 @@
       </p:sp>
       <p:sp>
         <p:nvSpPr>
-          <p:cNvPr id="32" name="직사각형 31">
-            <a:extLst>
-              <a:ext uri="{FF2B5EF4-FFF2-40B4-BE49-F238E27FC236}">
-                <a16:creationId xmlns:a16="http://schemas.microsoft.com/office/drawing/2014/main" id="{7A58CB89-58E3-410E-6B69-9D1E40DB6D6C}"/>
+          <p:cNvPr id="5" name="직사각형 4">
+            <a:extLst>
+              <a:ext uri="{FF2B5EF4-FFF2-40B4-BE49-F238E27FC236}">
+                <a16:creationId xmlns:a16="http://schemas.microsoft.com/office/drawing/2014/main" id="{88A441A4-7049-1B55-05C6-58095B070F8A}"/>
               </a:ext>
             </a:extLst>
           </p:cNvPr>
@@ -5521,7 +6880,815 @@
         </p:nvSpPr>
         <p:spPr>
           <a:xfrm>
-            <a:off x="2150136" y="3995803"/>
+            <a:off x="3989540" y="1584543"/>
+            <a:ext cx="3475972" cy="4797468"/>
+          </a:xfrm>
+          <a:prstGeom prst="rect">
+            <a:avLst/>
+          </a:prstGeom>
+        </p:spPr>
+        <p:style>
+          <a:lnRef idx="2">
+            <a:schemeClr val="accent3">
+              <a:shade val="15000"/>
+            </a:schemeClr>
+          </a:lnRef>
+          <a:fillRef idx="1">
+            <a:schemeClr val="accent3"/>
+          </a:fillRef>
+          <a:effectRef idx="0">
+            <a:schemeClr val="accent3"/>
+          </a:effectRef>
+          <a:fontRef idx="minor">
+            <a:schemeClr val="lt1"/>
+          </a:fontRef>
+        </p:style>
+        <p:txBody>
+          <a:bodyPr rtlCol="0" anchor="ctr"/>
+          <a:lstStyle/>
+          <a:p>
+            <a:pPr algn="ctr"/>
+            <a:endParaRPr lang="ko-KR" altLang="en-US" dirty="0"/>
+          </a:p>
+        </p:txBody>
+      </p:sp>
+      <p:sp>
+        <p:nvSpPr>
+          <p:cNvPr id="7" name="직사각형 6">
+            <a:extLst>
+              <a:ext uri="{FF2B5EF4-FFF2-40B4-BE49-F238E27FC236}">
+                <a16:creationId xmlns:a16="http://schemas.microsoft.com/office/drawing/2014/main" id="{6E7081F3-369F-6D10-B45D-3A44D24E4AAB}"/>
+              </a:ext>
+            </a:extLst>
+          </p:cNvPr>
+          <p:cNvSpPr/>
+          <p:nvPr/>
+        </p:nvSpPr>
+        <p:spPr>
+          <a:xfrm>
+            <a:off x="1346548" y="3895596"/>
+            <a:ext cx="2492679" cy="2486415"/>
+          </a:xfrm>
+          <a:prstGeom prst="rect">
+            <a:avLst/>
+          </a:prstGeom>
+        </p:spPr>
+        <p:style>
+          <a:lnRef idx="2">
+            <a:schemeClr val="accent3">
+              <a:shade val="15000"/>
+            </a:schemeClr>
+          </a:lnRef>
+          <a:fillRef idx="1">
+            <a:schemeClr val="accent3"/>
+          </a:fillRef>
+          <a:effectRef idx="0">
+            <a:schemeClr val="accent3"/>
+          </a:effectRef>
+          <a:fontRef idx="minor">
+            <a:schemeClr val="lt1"/>
+          </a:fontRef>
+        </p:style>
+        <p:txBody>
+          <a:bodyPr rtlCol="0" anchor="ctr"/>
+          <a:lstStyle/>
+          <a:p>
+            <a:pPr algn="ctr"/>
+            <a:endParaRPr lang="ko-KR" altLang="en-US" dirty="0"/>
+          </a:p>
+        </p:txBody>
+      </p:sp>
+      <p:grpSp>
+        <p:nvGrpSpPr>
+          <p:cNvPr id="17" name="그룹 16">
+            <a:extLst>
+              <a:ext uri="{FF2B5EF4-FFF2-40B4-BE49-F238E27FC236}">
+                <a16:creationId xmlns:a16="http://schemas.microsoft.com/office/drawing/2014/main" id="{8129DE50-408C-AF02-27C0-15AFC1A1B124}"/>
+              </a:ext>
+            </a:extLst>
+          </p:cNvPr>
+          <p:cNvGrpSpPr/>
+          <p:nvPr/>
+        </p:nvGrpSpPr>
+        <p:grpSpPr>
+          <a:xfrm>
+            <a:off x="1346549" y="1042792"/>
+            <a:ext cx="8780744" cy="441542"/>
+            <a:chOff x="1346549" y="1042792"/>
+            <a:chExt cx="8630432" cy="441542"/>
+          </a:xfrm>
+        </p:grpSpPr>
+        <p:sp>
+          <p:nvSpPr>
+            <p:cNvPr id="8" name="직사각형 7">
+              <a:extLst>
+                <a:ext uri="{FF2B5EF4-FFF2-40B4-BE49-F238E27FC236}">
+                  <a16:creationId xmlns:a16="http://schemas.microsoft.com/office/drawing/2014/main" id="{14FAD683-D7E6-19C5-C88A-790F8B280DA0}"/>
+                </a:ext>
+              </a:extLst>
+            </p:cNvPr>
+            <p:cNvSpPr/>
+            <p:nvPr/>
+          </p:nvSpPr>
+          <p:spPr>
+            <a:xfrm>
+              <a:off x="1346549" y="1042792"/>
+              <a:ext cx="914400" cy="441542"/>
+            </a:xfrm>
+            <a:prstGeom prst="rect">
+              <a:avLst/>
+            </a:prstGeom>
+          </p:spPr>
+          <p:style>
+            <a:lnRef idx="2">
+              <a:schemeClr val="accent1">
+                <a:shade val="15000"/>
+              </a:schemeClr>
+            </a:lnRef>
+            <a:fillRef idx="1">
+              <a:schemeClr val="accent1"/>
+            </a:fillRef>
+            <a:effectRef idx="0">
+              <a:schemeClr val="accent1"/>
+            </a:effectRef>
+            <a:fontRef idx="minor">
+              <a:schemeClr val="lt1"/>
+            </a:fontRef>
+          </p:style>
+          <p:txBody>
+            <a:bodyPr rtlCol="0" anchor="ctr"/>
+            <a:lstStyle/>
+            <a:p>
+              <a:pPr algn="ctr"/>
+              <a:r>
+                <a:rPr lang="ko-KR" altLang="en-US" dirty="0"/>
+                <a:t>가방</a:t>
+              </a:r>
+            </a:p>
+          </p:txBody>
+        </p:sp>
+        <p:sp>
+          <p:nvSpPr>
+            <p:cNvPr id="9" name="직사각형 8">
+              <a:extLst>
+                <a:ext uri="{FF2B5EF4-FFF2-40B4-BE49-F238E27FC236}">
+                  <a16:creationId xmlns:a16="http://schemas.microsoft.com/office/drawing/2014/main" id="{3C73F9D7-2D2E-03E9-B63E-53053CB44788}"/>
+                </a:ext>
+              </a:extLst>
+            </p:cNvPr>
+            <p:cNvSpPr/>
+            <p:nvPr/>
+          </p:nvSpPr>
+          <p:spPr>
+            <a:xfrm>
+              <a:off x="2311053" y="1042792"/>
+              <a:ext cx="914400" cy="441542"/>
+            </a:xfrm>
+            <a:prstGeom prst="rect">
+              <a:avLst/>
+            </a:prstGeom>
+          </p:spPr>
+          <p:style>
+            <a:lnRef idx="2">
+              <a:schemeClr val="accent1">
+                <a:shade val="15000"/>
+              </a:schemeClr>
+            </a:lnRef>
+            <a:fillRef idx="1">
+              <a:schemeClr val="accent1"/>
+            </a:fillRef>
+            <a:effectRef idx="0">
+              <a:schemeClr val="accent1"/>
+            </a:effectRef>
+            <a:fontRef idx="minor">
+              <a:schemeClr val="lt1"/>
+            </a:fontRef>
+          </p:style>
+          <p:txBody>
+            <a:bodyPr rtlCol="0" anchor="ctr"/>
+            <a:lstStyle/>
+            <a:p>
+              <a:pPr algn="ctr"/>
+              <a:r>
+                <a:rPr lang="ko-KR" altLang="en-US" dirty="0"/>
+                <a:t>검술</a:t>
+              </a:r>
+            </a:p>
+          </p:txBody>
+        </p:sp>
+        <p:sp>
+          <p:nvSpPr>
+            <p:cNvPr id="10" name="직사각형 9">
+              <a:extLst>
+                <a:ext uri="{FF2B5EF4-FFF2-40B4-BE49-F238E27FC236}">
+                  <a16:creationId xmlns:a16="http://schemas.microsoft.com/office/drawing/2014/main" id="{AAF6EB70-F5BE-BC1C-3974-477AC0513E58}"/>
+                </a:ext>
+              </a:extLst>
+            </p:cNvPr>
+            <p:cNvSpPr/>
+            <p:nvPr/>
+          </p:nvSpPr>
+          <p:spPr>
+            <a:xfrm>
+              <a:off x="3275557" y="1042792"/>
+              <a:ext cx="914400" cy="441542"/>
+            </a:xfrm>
+            <a:prstGeom prst="rect">
+              <a:avLst/>
+            </a:prstGeom>
+          </p:spPr>
+          <p:style>
+            <a:lnRef idx="2">
+              <a:schemeClr val="accent1">
+                <a:shade val="15000"/>
+              </a:schemeClr>
+            </a:lnRef>
+            <a:fillRef idx="1">
+              <a:schemeClr val="accent1"/>
+            </a:fillRef>
+            <a:effectRef idx="0">
+              <a:schemeClr val="accent1"/>
+            </a:effectRef>
+            <a:fontRef idx="minor">
+              <a:schemeClr val="lt1"/>
+            </a:fontRef>
+          </p:style>
+          <p:txBody>
+            <a:bodyPr rtlCol="0" anchor="ctr"/>
+            <a:lstStyle/>
+            <a:p>
+              <a:pPr algn="ctr"/>
+              <a:endParaRPr lang="ko-KR" altLang="en-US" dirty="0"/>
+            </a:p>
+          </p:txBody>
+        </p:sp>
+        <p:sp>
+          <p:nvSpPr>
+            <p:cNvPr id="11" name="직사각형 10">
+              <a:extLst>
+                <a:ext uri="{FF2B5EF4-FFF2-40B4-BE49-F238E27FC236}">
+                  <a16:creationId xmlns:a16="http://schemas.microsoft.com/office/drawing/2014/main" id="{BFD38E77-6379-A21B-1DAB-E2036855865B}"/>
+                </a:ext>
+              </a:extLst>
+            </p:cNvPr>
+            <p:cNvSpPr/>
+            <p:nvPr/>
+          </p:nvSpPr>
+          <p:spPr>
+            <a:xfrm>
+              <a:off x="4240061" y="1042792"/>
+              <a:ext cx="914400" cy="441542"/>
+            </a:xfrm>
+            <a:prstGeom prst="rect">
+              <a:avLst/>
+            </a:prstGeom>
+          </p:spPr>
+          <p:style>
+            <a:lnRef idx="2">
+              <a:schemeClr val="accent1">
+                <a:shade val="15000"/>
+              </a:schemeClr>
+            </a:lnRef>
+            <a:fillRef idx="1">
+              <a:schemeClr val="accent1"/>
+            </a:fillRef>
+            <a:effectRef idx="0">
+              <a:schemeClr val="accent1"/>
+            </a:effectRef>
+            <a:fontRef idx="minor">
+              <a:schemeClr val="lt1"/>
+            </a:fontRef>
+          </p:style>
+          <p:txBody>
+            <a:bodyPr rtlCol="0" anchor="ctr"/>
+            <a:lstStyle/>
+            <a:p>
+              <a:pPr algn="ctr"/>
+              <a:endParaRPr lang="ko-KR" altLang="en-US" dirty="0"/>
+            </a:p>
+          </p:txBody>
+        </p:sp>
+        <p:sp>
+          <p:nvSpPr>
+            <p:cNvPr id="12" name="직사각형 11">
+              <a:extLst>
+                <a:ext uri="{FF2B5EF4-FFF2-40B4-BE49-F238E27FC236}">
+                  <a16:creationId xmlns:a16="http://schemas.microsoft.com/office/drawing/2014/main" id="{E7AB2AE5-03F9-68A2-E347-03F2DD1B7B62}"/>
+                </a:ext>
+              </a:extLst>
+            </p:cNvPr>
+            <p:cNvSpPr/>
+            <p:nvPr/>
+          </p:nvSpPr>
+          <p:spPr>
+            <a:xfrm>
+              <a:off x="5204565" y="1042792"/>
+              <a:ext cx="914400" cy="441542"/>
+            </a:xfrm>
+            <a:prstGeom prst="rect">
+              <a:avLst/>
+            </a:prstGeom>
+          </p:spPr>
+          <p:style>
+            <a:lnRef idx="2">
+              <a:schemeClr val="accent1">
+                <a:shade val="15000"/>
+              </a:schemeClr>
+            </a:lnRef>
+            <a:fillRef idx="1">
+              <a:schemeClr val="accent1"/>
+            </a:fillRef>
+            <a:effectRef idx="0">
+              <a:schemeClr val="accent1"/>
+            </a:effectRef>
+            <a:fontRef idx="minor">
+              <a:schemeClr val="lt1"/>
+            </a:fontRef>
+          </p:style>
+          <p:txBody>
+            <a:bodyPr rtlCol="0" anchor="ctr"/>
+            <a:lstStyle/>
+            <a:p>
+              <a:pPr algn="ctr"/>
+              <a:endParaRPr lang="ko-KR" altLang="en-US" dirty="0"/>
+            </a:p>
+          </p:txBody>
+        </p:sp>
+        <p:sp>
+          <p:nvSpPr>
+            <p:cNvPr id="13" name="직사각형 12">
+              <a:extLst>
+                <a:ext uri="{FF2B5EF4-FFF2-40B4-BE49-F238E27FC236}">
+                  <a16:creationId xmlns:a16="http://schemas.microsoft.com/office/drawing/2014/main" id="{1B05A433-160D-9E63-A49C-6A3F787EA597}"/>
+                </a:ext>
+              </a:extLst>
+            </p:cNvPr>
+            <p:cNvSpPr/>
+            <p:nvPr/>
+          </p:nvSpPr>
+          <p:spPr>
+            <a:xfrm>
+              <a:off x="6169069" y="1042792"/>
+              <a:ext cx="914400" cy="441542"/>
+            </a:xfrm>
+            <a:prstGeom prst="rect">
+              <a:avLst/>
+            </a:prstGeom>
+          </p:spPr>
+          <p:style>
+            <a:lnRef idx="2">
+              <a:schemeClr val="accent1">
+                <a:shade val="15000"/>
+              </a:schemeClr>
+            </a:lnRef>
+            <a:fillRef idx="1">
+              <a:schemeClr val="accent1"/>
+            </a:fillRef>
+            <a:effectRef idx="0">
+              <a:schemeClr val="accent1"/>
+            </a:effectRef>
+            <a:fontRef idx="minor">
+              <a:schemeClr val="lt1"/>
+            </a:fontRef>
+          </p:style>
+          <p:txBody>
+            <a:bodyPr rtlCol="0" anchor="ctr"/>
+            <a:lstStyle/>
+            <a:p>
+              <a:pPr algn="ctr"/>
+              <a:endParaRPr lang="ko-KR" altLang="en-US" dirty="0"/>
+            </a:p>
+          </p:txBody>
+        </p:sp>
+        <p:sp>
+          <p:nvSpPr>
+            <p:cNvPr id="14" name="직사각형 13">
+              <a:extLst>
+                <a:ext uri="{FF2B5EF4-FFF2-40B4-BE49-F238E27FC236}">
+                  <a16:creationId xmlns:a16="http://schemas.microsoft.com/office/drawing/2014/main" id="{CEE9F37B-D508-C567-A7EC-D8F6C72B7E96}"/>
+                </a:ext>
+              </a:extLst>
+            </p:cNvPr>
+            <p:cNvSpPr/>
+            <p:nvPr/>
+          </p:nvSpPr>
+          <p:spPr>
+            <a:xfrm>
+              <a:off x="7133573" y="1042792"/>
+              <a:ext cx="914400" cy="441542"/>
+            </a:xfrm>
+            <a:prstGeom prst="rect">
+              <a:avLst/>
+            </a:prstGeom>
+          </p:spPr>
+          <p:style>
+            <a:lnRef idx="2">
+              <a:schemeClr val="accent1">
+                <a:shade val="15000"/>
+              </a:schemeClr>
+            </a:lnRef>
+            <a:fillRef idx="1">
+              <a:schemeClr val="accent1"/>
+            </a:fillRef>
+            <a:effectRef idx="0">
+              <a:schemeClr val="accent1"/>
+            </a:effectRef>
+            <a:fontRef idx="minor">
+              <a:schemeClr val="lt1"/>
+            </a:fontRef>
+          </p:style>
+          <p:txBody>
+            <a:bodyPr rtlCol="0" anchor="ctr"/>
+            <a:lstStyle/>
+            <a:p>
+              <a:pPr algn="ctr"/>
+              <a:endParaRPr lang="ko-KR" altLang="en-US" dirty="0"/>
+            </a:p>
+          </p:txBody>
+        </p:sp>
+        <p:sp>
+          <p:nvSpPr>
+            <p:cNvPr id="15" name="직사각형 14">
+              <a:extLst>
+                <a:ext uri="{FF2B5EF4-FFF2-40B4-BE49-F238E27FC236}">
+                  <a16:creationId xmlns:a16="http://schemas.microsoft.com/office/drawing/2014/main" id="{0980458D-F6A3-C524-A285-7324558D2AD5}"/>
+                </a:ext>
+              </a:extLst>
+            </p:cNvPr>
+            <p:cNvSpPr/>
+            <p:nvPr/>
+          </p:nvSpPr>
+          <p:spPr>
+            <a:xfrm>
+              <a:off x="8098077" y="1042792"/>
+              <a:ext cx="914400" cy="441542"/>
+            </a:xfrm>
+            <a:prstGeom prst="rect">
+              <a:avLst/>
+            </a:prstGeom>
+          </p:spPr>
+          <p:style>
+            <a:lnRef idx="2">
+              <a:schemeClr val="accent1">
+                <a:shade val="15000"/>
+              </a:schemeClr>
+            </a:lnRef>
+            <a:fillRef idx="1">
+              <a:schemeClr val="accent1"/>
+            </a:fillRef>
+            <a:effectRef idx="0">
+              <a:schemeClr val="accent1"/>
+            </a:effectRef>
+            <a:fontRef idx="minor">
+              <a:schemeClr val="lt1"/>
+            </a:fontRef>
+          </p:style>
+          <p:txBody>
+            <a:bodyPr rtlCol="0" anchor="ctr"/>
+            <a:lstStyle/>
+            <a:p>
+              <a:pPr algn="ctr"/>
+              <a:endParaRPr lang="ko-KR" altLang="en-US" dirty="0"/>
+            </a:p>
+          </p:txBody>
+        </p:sp>
+        <p:sp>
+          <p:nvSpPr>
+            <p:cNvPr id="16" name="직사각형 15">
+              <a:extLst>
+                <a:ext uri="{FF2B5EF4-FFF2-40B4-BE49-F238E27FC236}">
+                  <a16:creationId xmlns:a16="http://schemas.microsoft.com/office/drawing/2014/main" id="{78891BC4-2AAD-F374-E190-8442F350242D}"/>
+                </a:ext>
+              </a:extLst>
+            </p:cNvPr>
+            <p:cNvSpPr/>
+            <p:nvPr/>
+          </p:nvSpPr>
+          <p:spPr>
+            <a:xfrm>
+              <a:off x="9062581" y="1042792"/>
+              <a:ext cx="914400" cy="441542"/>
+            </a:xfrm>
+            <a:prstGeom prst="rect">
+              <a:avLst/>
+            </a:prstGeom>
+          </p:spPr>
+          <p:style>
+            <a:lnRef idx="2">
+              <a:schemeClr val="accent1">
+                <a:shade val="15000"/>
+              </a:schemeClr>
+            </a:lnRef>
+            <a:fillRef idx="1">
+              <a:schemeClr val="accent1"/>
+            </a:fillRef>
+            <a:effectRef idx="0">
+              <a:schemeClr val="accent1"/>
+            </a:effectRef>
+            <a:fontRef idx="minor">
+              <a:schemeClr val="lt1"/>
+            </a:fontRef>
+          </p:style>
+          <p:txBody>
+            <a:bodyPr rtlCol="0" anchor="ctr"/>
+            <a:lstStyle/>
+            <a:p>
+              <a:pPr algn="ctr"/>
+              <a:endParaRPr lang="ko-KR" altLang="en-US" dirty="0"/>
+            </a:p>
+          </p:txBody>
+        </p:sp>
+      </p:grpSp>
+      <p:sp>
+        <p:nvSpPr>
+          <p:cNvPr id="2" name="직사각형 1">
+            <a:extLst>
+              <a:ext uri="{FF2B5EF4-FFF2-40B4-BE49-F238E27FC236}">
+                <a16:creationId xmlns:a16="http://schemas.microsoft.com/office/drawing/2014/main" id="{EAC72300-EBD5-B0E2-20B1-FFF093DA10AA}"/>
+              </a:ext>
+            </a:extLst>
+          </p:cNvPr>
+          <p:cNvSpPr/>
+          <p:nvPr/>
+        </p:nvSpPr>
+        <p:spPr>
+          <a:xfrm>
+            <a:off x="1528749" y="3075138"/>
+            <a:ext cx="565925" cy="541752"/>
+          </a:xfrm>
+          <a:prstGeom prst="rect">
+            <a:avLst/>
+          </a:prstGeom>
+          <a:solidFill>
+            <a:schemeClr val="bg1">
+              <a:lumMod val="75000"/>
+            </a:schemeClr>
+          </a:solidFill>
+        </p:spPr>
+        <p:style>
+          <a:lnRef idx="2">
+            <a:schemeClr val="accent3">
+              <a:shade val="15000"/>
+            </a:schemeClr>
+          </a:lnRef>
+          <a:fillRef idx="1">
+            <a:schemeClr val="accent3"/>
+          </a:fillRef>
+          <a:effectRef idx="0">
+            <a:schemeClr val="accent3"/>
+          </a:effectRef>
+          <a:fontRef idx="minor">
+            <a:schemeClr val="lt1"/>
+          </a:fontRef>
+        </p:style>
+        <p:txBody>
+          <a:bodyPr wrap="none" rtlCol="0" anchor="ctr"/>
+          <a:lstStyle/>
+          <a:p>
+            <a:pPr algn="ctr"/>
+            <a:r>
+              <a:rPr lang="en-US" altLang="ko-KR" dirty="0"/>
+              <a:t>Icon</a:t>
+            </a:r>
+            <a:endParaRPr lang="ko-KR" altLang="en-US" dirty="0"/>
+          </a:p>
+        </p:txBody>
+      </p:sp>
+      <p:sp>
+        <p:nvSpPr>
+          <p:cNvPr id="3" name="직사각형 2">
+            <a:extLst>
+              <a:ext uri="{FF2B5EF4-FFF2-40B4-BE49-F238E27FC236}">
+                <a16:creationId xmlns:a16="http://schemas.microsoft.com/office/drawing/2014/main" id="{5CA3A781-CE73-542D-1796-AAACFD4B8667}"/>
+              </a:ext>
+            </a:extLst>
+          </p:cNvPr>
+          <p:cNvSpPr/>
+          <p:nvPr/>
+        </p:nvSpPr>
+        <p:spPr>
+          <a:xfrm>
+            <a:off x="1498782" y="1712934"/>
+            <a:ext cx="565925" cy="541752"/>
+          </a:xfrm>
+          <a:prstGeom prst="rect">
+            <a:avLst/>
+          </a:prstGeom>
+          <a:solidFill>
+            <a:schemeClr val="bg1">
+              <a:lumMod val="75000"/>
+            </a:schemeClr>
+          </a:solidFill>
+        </p:spPr>
+        <p:style>
+          <a:lnRef idx="2">
+            <a:schemeClr val="accent3">
+              <a:shade val="15000"/>
+            </a:schemeClr>
+          </a:lnRef>
+          <a:fillRef idx="1">
+            <a:schemeClr val="accent3"/>
+          </a:fillRef>
+          <a:effectRef idx="0">
+            <a:schemeClr val="accent3"/>
+          </a:effectRef>
+          <a:fontRef idx="minor">
+            <a:schemeClr val="lt1"/>
+          </a:fontRef>
+        </p:style>
+        <p:txBody>
+          <a:bodyPr wrap="none" rtlCol="0" anchor="ctr"/>
+          <a:lstStyle/>
+          <a:p>
+            <a:pPr algn="ctr"/>
+            <a:r>
+              <a:rPr lang="en-US" altLang="ko-KR" dirty="0"/>
+              <a:t>Icon</a:t>
+            </a:r>
+            <a:endParaRPr lang="ko-KR" altLang="en-US" dirty="0"/>
+          </a:p>
+        </p:txBody>
+      </p:sp>
+      <p:sp>
+        <p:nvSpPr>
+          <p:cNvPr id="18" name="직사각형 17">
+            <a:extLst>
+              <a:ext uri="{FF2B5EF4-FFF2-40B4-BE49-F238E27FC236}">
+                <a16:creationId xmlns:a16="http://schemas.microsoft.com/office/drawing/2014/main" id="{9FB89A69-A509-1A91-A31D-75C21D216733}"/>
+              </a:ext>
+            </a:extLst>
+          </p:cNvPr>
+          <p:cNvSpPr/>
+          <p:nvPr/>
+        </p:nvSpPr>
+        <p:spPr>
+          <a:xfrm>
+            <a:off x="1498782" y="2387772"/>
+            <a:ext cx="565925" cy="541752"/>
+          </a:xfrm>
+          <a:prstGeom prst="rect">
+            <a:avLst/>
+          </a:prstGeom>
+          <a:solidFill>
+            <a:schemeClr val="bg1">
+              <a:lumMod val="75000"/>
+            </a:schemeClr>
+          </a:solidFill>
+        </p:spPr>
+        <p:style>
+          <a:lnRef idx="2">
+            <a:schemeClr val="accent3">
+              <a:shade val="15000"/>
+            </a:schemeClr>
+          </a:lnRef>
+          <a:fillRef idx="1">
+            <a:schemeClr val="accent3"/>
+          </a:fillRef>
+          <a:effectRef idx="0">
+            <a:schemeClr val="accent3"/>
+          </a:effectRef>
+          <a:fontRef idx="minor">
+            <a:schemeClr val="lt1"/>
+          </a:fontRef>
+        </p:style>
+        <p:txBody>
+          <a:bodyPr wrap="none" rtlCol="0" anchor="ctr"/>
+          <a:lstStyle/>
+          <a:p>
+            <a:pPr algn="ctr"/>
+            <a:r>
+              <a:rPr lang="en-US" altLang="ko-KR" dirty="0"/>
+              <a:t>Icon</a:t>
+            </a:r>
+            <a:endParaRPr lang="ko-KR" altLang="en-US" dirty="0"/>
+          </a:p>
+        </p:txBody>
+      </p:sp>
+      <p:sp>
+        <p:nvSpPr>
+          <p:cNvPr id="19" name="직사각형 18">
+            <a:extLst>
+              <a:ext uri="{FF2B5EF4-FFF2-40B4-BE49-F238E27FC236}">
+                <a16:creationId xmlns:a16="http://schemas.microsoft.com/office/drawing/2014/main" id="{0F2DDB03-8F2C-32E2-6DFD-0073A8CE1B24}"/>
+              </a:ext>
+            </a:extLst>
+          </p:cNvPr>
+          <p:cNvSpPr/>
+          <p:nvPr/>
+        </p:nvSpPr>
+        <p:spPr>
+          <a:xfrm>
+            <a:off x="2309924" y="3075138"/>
+            <a:ext cx="565925" cy="541752"/>
+          </a:xfrm>
+          <a:prstGeom prst="rect">
+            <a:avLst/>
+          </a:prstGeom>
+          <a:solidFill>
+            <a:schemeClr val="bg1">
+              <a:lumMod val="75000"/>
+            </a:schemeClr>
+          </a:solidFill>
+        </p:spPr>
+        <p:style>
+          <a:lnRef idx="2">
+            <a:schemeClr val="accent3">
+              <a:shade val="15000"/>
+            </a:schemeClr>
+          </a:lnRef>
+          <a:fillRef idx="1">
+            <a:schemeClr val="accent3"/>
+          </a:fillRef>
+          <a:effectRef idx="0">
+            <a:schemeClr val="accent3"/>
+          </a:effectRef>
+          <a:fontRef idx="minor">
+            <a:schemeClr val="lt1"/>
+          </a:fontRef>
+        </p:style>
+        <p:txBody>
+          <a:bodyPr wrap="none" rtlCol="0" anchor="ctr"/>
+          <a:lstStyle/>
+          <a:p>
+            <a:pPr algn="ctr"/>
+            <a:r>
+              <a:rPr lang="en-US" altLang="ko-KR" dirty="0"/>
+              <a:t>Icon</a:t>
+            </a:r>
+            <a:endParaRPr lang="ko-KR" altLang="en-US" dirty="0"/>
+          </a:p>
+        </p:txBody>
+      </p:sp>
+      <p:sp>
+        <p:nvSpPr>
+          <p:cNvPr id="20" name="직사각형 19">
+            <a:extLst>
+              <a:ext uri="{FF2B5EF4-FFF2-40B4-BE49-F238E27FC236}">
+                <a16:creationId xmlns:a16="http://schemas.microsoft.com/office/drawing/2014/main" id="{CCAEC51F-9CC5-A641-144A-86785C874E86}"/>
+              </a:ext>
+            </a:extLst>
+          </p:cNvPr>
+          <p:cNvSpPr/>
+          <p:nvPr/>
+        </p:nvSpPr>
+        <p:spPr>
+          <a:xfrm>
+            <a:off x="3091099" y="3075138"/>
+            <a:ext cx="565925" cy="541752"/>
+          </a:xfrm>
+          <a:prstGeom prst="rect">
+            <a:avLst/>
+          </a:prstGeom>
+          <a:solidFill>
+            <a:schemeClr val="bg1">
+              <a:lumMod val="75000"/>
+            </a:schemeClr>
+          </a:solidFill>
+        </p:spPr>
+        <p:style>
+          <a:lnRef idx="2">
+            <a:schemeClr val="accent3">
+              <a:shade val="15000"/>
+            </a:schemeClr>
+          </a:lnRef>
+          <a:fillRef idx="1">
+            <a:schemeClr val="accent3"/>
+          </a:fillRef>
+          <a:effectRef idx="0">
+            <a:schemeClr val="accent3"/>
+          </a:effectRef>
+          <a:fontRef idx="minor">
+            <a:schemeClr val="lt1"/>
+          </a:fontRef>
+        </p:style>
+        <p:txBody>
+          <a:bodyPr wrap="none" rtlCol="0" anchor="ctr"/>
+          <a:lstStyle/>
+          <a:p>
+            <a:pPr algn="ctr"/>
+            <a:r>
+              <a:rPr lang="en-US" altLang="ko-KR" dirty="0"/>
+              <a:t>Icon</a:t>
+            </a:r>
+            <a:endParaRPr lang="ko-KR" altLang="en-US" dirty="0"/>
+          </a:p>
+        </p:txBody>
+      </p:sp>
+      <p:sp>
+        <p:nvSpPr>
+          <p:cNvPr id="21" name="직사각형 20">
+            <a:extLst>
+              <a:ext uri="{FF2B5EF4-FFF2-40B4-BE49-F238E27FC236}">
+                <a16:creationId xmlns:a16="http://schemas.microsoft.com/office/drawing/2014/main" id="{5A683475-0AA7-E766-02A5-5113A0B3BF15}"/>
+              </a:ext>
+            </a:extLst>
+          </p:cNvPr>
+          <p:cNvSpPr/>
+          <p:nvPr/>
+        </p:nvSpPr>
+        <p:spPr>
+          <a:xfrm>
+            <a:off x="2150136" y="1712934"/>
             <a:ext cx="1557568" cy="541752"/>
           </a:xfrm>
           <a:prstGeom prst="rect">
@@ -5554,17 +7721,17 @@
             <a:pPr algn="ctr"/>
             <a:r>
               <a:rPr lang="ko-KR" altLang="en-US" dirty="0"/>
-              <a:t>유파 이름</a:t>
-            </a:r>
-          </a:p>
-        </p:txBody>
-      </p:sp>
-      <p:sp>
-        <p:nvSpPr>
-          <p:cNvPr id="33" name="직사각형 32">
-            <a:extLst>
-              <a:ext uri="{FF2B5EF4-FFF2-40B4-BE49-F238E27FC236}">
-                <a16:creationId xmlns:a16="http://schemas.microsoft.com/office/drawing/2014/main" id="{480300DD-2AE6-D830-888C-3AAA488DE750}"/>
+              <a:t>무기 이름</a:t>
+            </a:r>
+          </a:p>
+        </p:txBody>
+      </p:sp>
+      <p:sp>
+        <p:nvSpPr>
+          <p:cNvPr id="22" name="직사각형 21">
+            <a:extLst>
+              <a:ext uri="{FF2B5EF4-FFF2-40B4-BE49-F238E27FC236}">
+                <a16:creationId xmlns:a16="http://schemas.microsoft.com/office/drawing/2014/main" id="{CA55F559-75DC-9638-92E2-BB040EBF9838}"/>
               </a:ext>
             </a:extLst>
           </p:cNvPr>
@@ -5573,12 +7740,15 @@
         </p:nvSpPr>
         <p:spPr>
           <a:xfrm>
-            <a:off x="1498782" y="4866360"/>
-            <a:ext cx="2158242" cy="313152"/>
+            <a:off x="2150136" y="2383076"/>
+            <a:ext cx="1557568" cy="541752"/>
           </a:xfrm>
           <a:prstGeom prst="rect">
             <a:avLst/>
           </a:prstGeom>
+          <a:ln>
+            <a:noFill/>
+          </a:ln>
         </p:spPr>
         <p:style>
           <a:lnRef idx="2">
@@ -5601,16 +7771,23 @@
           <a:lstStyle/>
           <a:p>
             <a:pPr algn="ctr"/>
-            <a:endParaRPr lang="ko-KR" altLang="en-US" dirty="0"/>
-          </a:p>
-        </p:txBody>
-      </p:sp>
-      <p:sp>
-        <p:nvSpPr>
-          <p:cNvPr id="34" name="직사각형 33">
-            <a:extLst>
-              <a:ext uri="{FF2B5EF4-FFF2-40B4-BE49-F238E27FC236}">
-                <a16:creationId xmlns:a16="http://schemas.microsoft.com/office/drawing/2014/main" id="{83FE638E-2E15-94CA-3D72-AD10AF7131B9}"/>
+            <a:r>
+              <a:rPr lang="ko-KR" altLang="en-US" dirty="0" err="1"/>
+              <a:t>방어구</a:t>
+            </a:r>
+            <a:r>
+              <a:rPr lang="ko-KR" altLang="en-US" dirty="0"/>
+              <a:t> 이름</a:t>
+            </a:r>
+          </a:p>
+        </p:txBody>
+      </p:sp>
+      <p:sp>
+        <p:nvSpPr>
+          <p:cNvPr id="23" name="직사각형 22">
+            <a:extLst>
+              <a:ext uri="{FF2B5EF4-FFF2-40B4-BE49-F238E27FC236}">
+                <a16:creationId xmlns:a16="http://schemas.microsoft.com/office/drawing/2014/main" id="{7F146081-9C92-B92D-FFB1-80B080780A76}"/>
               </a:ext>
             </a:extLst>
           </p:cNvPr>
@@ -5619,12 +7796,18 @@
         </p:nvSpPr>
         <p:spPr>
           <a:xfrm>
-            <a:off x="1498782" y="5239008"/>
-            <a:ext cx="2158242" cy="313152"/>
+            <a:off x="1433898" y="1652651"/>
+            <a:ext cx="2323910" cy="658397"/>
           </a:xfrm>
           <a:prstGeom prst="rect">
             <a:avLst/>
           </a:prstGeom>
+          <a:noFill/>
+          <a:ln w="28575">
+            <a:solidFill>
+              <a:srgbClr val="FFC000"/>
+            </a:solidFill>
+          </a:ln>
         </p:spPr>
         <p:style>
           <a:lnRef idx="2">
@@ -5653,10 +7836,10 @@
       </p:sp>
       <p:sp>
         <p:nvSpPr>
-          <p:cNvPr id="35" name="직사각형 34">
-            <a:extLst>
-              <a:ext uri="{FF2B5EF4-FFF2-40B4-BE49-F238E27FC236}">
-                <a16:creationId xmlns:a16="http://schemas.microsoft.com/office/drawing/2014/main" id="{5CE22937-575C-C029-01B1-44C0AF84A82A}"/>
+          <p:cNvPr id="31" name="직사각형 30">
+            <a:extLst>
+              <a:ext uri="{FF2B5EF4-FFF2-40B4-BE49-F238E27FC236}">
+                <a16:creationId xmlns:a16="http://schemas.microsoft.com/office/drawing/2014/main" id="{E6D0182C-8FA1-4D6B-E51B-802AEC232C7C}"/>
               </a:ext>
             </a:extLst>
           </p:cNvPr>
@@ -5665,12 +7848,17 @@
         </p:nvSpPr>
         <p:spPr>
           <a:xfrm>
-            <a:off x="1498782" y="5611656"/>
-            <a:ext cx="2158242" cy="313152"/>
+            <a:off x="1498782" y="3995803"/>
+            <a:ext cx="565925" cy="541752"/>
           </a:xfrm>
           <a:prstGeom prst="rect">
             <a:avLst/>
           </a:prstGeom>
+          <a:solidFill>
+            <a:schemeClr val="bg1">
+              <a:lumMod val="75000"/>
+            </a:schemeClr>
+          </a:solidFill>
         </p:spPr>
         <p:style>
           <a:lnRef idx="2">
@@ -5689,20 +7877,24 @@
           </a:fontRef>
         </p:style>
         <p:txBody>
-          <a:bodyPr rtlCol="0" anchor="ctr"/>
+          <a:bodyPr wrap="none" rtlCol="0" anchor="ctr"/>
           <a:lstStyle/>
           <a:p>
             <a:pPr algn="ctr"/>
+            <a:r>
+              <a:rPr lang="en-US" altLang="ko-KR" dirty="0"/>
+              <a:t>Icon</a:t>
+            </a:r>
             <a:endParaRPr lang="ko-KR" altLang="en-US" dirty="0"/>
           </a:p>
         </p:txBody>
       </p:sp>
       <p:sp>
         <p:nvSpPr>
-          <p:cNvPr id="36" name="직사각형 35">
-            <a:extLst>
-              <a:ext uri="{FF2B5EF4-FFF2-40B4-BE49-F238E27FC236}">
-                <a16:creationId xmlns:a16="http://schemas.microsoft.com/office/drawing/2014/main" id="{C9EEEE43-C596-B4DA-0FE8-DD381EC9A14C}"/>
+          <p:cNvPr id="32" name="직사각형 31">
+            <a:extLst>
+              <a:ext uri="{FF2B5EF4-FFF2-40B4-BE49-F238E27FC236}">
+                <a16:creationId xmlns:a16="http://schemas.microsoft.com/office/drawing/2014/main" id="{D4845D9B-569C-33D9-BC62-801A9352D783}"/>
               </a:ext>
             </a:extLst>
           </p:cNvPr>
@@ -5711,12 +7903,15 @@
         </p:nvSpPr>
         <p:spPr>
           <a:xfrm>
-            <a:off x="1498782" y="5984304"/>
-            <a:ext cx="2158242" cy="313152"/>
+            <a:off x="2150136" y="3995803"/>
+            <a:ext cx="1557568" cy="541752"/>
           </a:xfrm>
           <a:prstGeom prst="rect">
             <a:avLst/>
           </a:prstGeom>
+          <a:ln>
+            <a:noFill/>
+          </a:ln>
         </p:spPr>
         <p:style>
           <a:lnRef idx="2">
@@ -5739,6 +7934,960 @@
           <a:lstStyle/>
           <a:p>
             <a:pPr algn="ctr"/>
+            <a:r>
+              <a:rPr lang="ko-KR" altLang="en-US" dirty="0"/>
+              <a:t>유파 이름</a:t>
+            </a:r>
+          </a:p>
+        </p:txBody>
+      </p:sp>
+      <p:sp>
+        <p:nvSpPr>
+          <p:cNvPr id="33" name="직사각형 32">
+            <a:extLst>
+              <a:ext uri="{FF2B5EF4-FFF2-40B4-BE49-F238E27FC236}">
+                <a16:creationId xmlns:a16="http://schemas.microsoft.com/office/drawing/2014/main" id="{ECD37C46-120B-7C24-D81B-371E5CBCB928}"/>
+              </a:ext>
+            </a:extLst>
+          </p:cNvPr>
+          <p:cNvSpPr/>
+          <p:nvPr/>
+        </p:nvSpPr>
+        <p:spPr>
+          <a:xfrm>
+            <a:off x="1498782" y="4866360"/>
+            <a:ext cx="2158242" cy="313152"/>
+          </a:xfrm>
+          <a:prstGeom prst="rect">
+            <a:avLst/>
+          </a:prstGeom>
+        </p:spPr>
+        <p:style>
+          <a:lnRef idx="2">
+            <a:schemeClr val="accent3">
+              <a:shade val="15000"/>
+            </a:schemeClr>
+          </a:lnRef>
+          <a:fillRef idx="1">
+            <a:schemeClr val="accent3"/>
+          </a:fillRef>
+          <a:effectRef idx="0">
+            <a:schemeClr val="accent3"/>
+          </a:effectRef>
+          <a:fontRef idx="minor">
+            <a:schemeClr val="lt1"/>
+          </a:fontRef>
+        </p:style>
+        <p:txBody>
+          <a:bodyPr rtlCol="0" anchor="ctr"/>
+          <a:lstStyle/>
+          <a:p>
+            <a:pPr algn="ctr"/>
+            <a:endParaRPr lang="ko-KR" altLang="en-US" dirty="0"/>
+          </a:p>
+        </p:txBody>
+      </p:sp>
+      <p:sp>
+        <p:nvSpPr>
+          <p:cNvPr id="34" name="직사각형 33">
+            <a:extLst>
+              <a:ext uri="{FF2B5EF4-FFF2-40B4-BE49-F238E27FC236}">
+                <a16:creationId xmlns:a16="http://schemas.microsoft.com/office/drawing/2014/main" id="{5EF260FF-0747-5423-CC22-807B79EAE89A}"/>
+              </a:ext>
+            </a:extLst>
+          </p:cNvPr>
+          <p:cNvSpPr/>
+          <p:nvPr/>
+        </p:nvSpPr>
+        <p:spPr>
+          <a:xfrm>
+            <a:off x="1498782" y="5239008"/>
+            <a:ext cx="2158242" cy="313152"/>
+          </a:xfrm>
+          <a:prstGeom prst="rect">
+            <a:avLst/>
+          </a:prstGeom>
+        </p:spPr>
+        <p:style>
+          <a:lnRef idx="2">
+            <a:schemeClr val="accent3">
+              <a:shade val="15000"/>
+            </a:schemeClr>
+          </a:lnRef>
+          <a:fillRef idx="1">
+            <a:schemeClr val="accent3"/>
+          </a:fillRef>
+          <a:effectRef idx="0">
+            <a:schemeClr val="accent3"/>
+          </a:effectRef>
+          <a:fontRef idx="minor">
+            <a:schemeClr val="lt1"/>
+          </a:fontRef>
+        </p:style>
+        <p:txBody>
+          <a:bodyPr rtlCol="0" anchor="ctr"/>
+          <a:lstStyle/>
+          <a:p>
+            <a:pPr algn="ctr"/>
+            <a:endParaRPr lang="ko-KR" altLang="en-US" dirty="0"/>
+          </a:p>
+        </p:txBody>
+      </p:sp>
+      <p:sp>
+        <p:nvSpPr>
+          <p:cNvPr id="35" name="직사각형 34">
+            <a:extLst>
+              <a:ext uri="{FF2B5EF4-FFF2-40B4-BE49-F238E27FC236}">
+                <a16:creationId xmlns:a16="http://schemas.microsoft.com/office/drawing/2014/main" id="{350B1423-0846-3E7F-FFFE-84E6A055290B}"/>
+              </a:ext>
+            </a:extLst>
+          </p:cNvPr>
+          <p:cNvSpPr/>
+          <p:nvPr/>
+        </p:nvSpPr>
+        <p:spPr>
+          <a:xfrm>
+            <a:off x="1498782" y="5611656"/>
+            <a:ext cx="2158242" cy="313152"/>
+          </a:xfrm>
+          <a:prstGeom prst="rect">
+            <a:avLst/>
+          </a:prstGeom>
+        </p:spPr>
+        <p:style>
+          <a:lnRef idx="2">
+            <a:schemeClr val="accent3">
+              <a:shade val="15000"/>
+            </a:schemeClr>
+          </a:lnRef>
+          <a:fillRef idx="1">
+            <a:schemeClr val="accent3"/>
+          </a:fillRef>
+          <a:effectRef idx="0">
+            <a:schemeClr val="accent3"/>
+          </a:effectRef>
+          <a:fontRef idx="minor">
+            <a:schemeClr val="lt1"/>
+          </a:fontRef>
+        </p:style>
+        <p:txBody>
+          <a:bodyPr rtlCol="0" anchor="ctr"/>
+          <a:lstStyle/>
+          <a:p>
+            <a:pPr algn="ctr"/>
+            <a:endParaRPr lang="ko-KR" altLang="en-US" dirty="0"/>
+          </a:p>
+        </p:txBody>
+      </p:sp>
+      <p:sp>
+        <p:nvSpPr>
+          <p:cNvPr id="36" name="직사각형 35">
+            <a:extLst>
+              <a:ext uri="{FF2B5EF4-FFF2-40B4-BE49-F238E27FC236}">
+                <a16:creationId xmlns:a16="http://schemas.microsoft.com/office/drawing/2014/main" id="{72353D9D-D3C9-0E1F-1C2E-420ADF929830}"/>
+              </a:ext>
+            </a:extLst>
+          </p:cNvPr>
+          <p:cNvSpPr/>
+          <p:nvPr/>
+        </p:nvSpPr>
+        <p:spPr>
+          <a:xfrm>
+            <a:off x="1498782" y="5984304"/>
+            <a:ext cx="2158242" cy="313152"/>
+          </a:xfrm>
+          <a:prstGeom prst="rect">
+            <a:avLst/>
+          </a:prstGeom>
+        </p:spPr>
+        <p:style>
+          <a:lnRef idx="2">
+            <a:schemeClr val="accent3">
+              <a:shade val="15000"/>
+            </a:schemeClr>
+          </a:lnRef>
+          <a:fillRef idx="1">
+            <a:schemeClr val="accent3"/>
+          </a:fillRef>
+          <a:effectRef idx="0">
+            <a:schemeClr val="accent3"/>
+          </a:effectRef>
+          <a:fontRef idx="minor">
+            <a:schemeClr val="lt1"/>
+          </a:fontRef>
+        </p:style>
+        <p:txBody>
+          <a:bodyPr rtlCol="0" anchor="ctr"/>
+          <a:lstStyle/>
+          <a:p>
+            <a:pPr algn="ctr"/>
+            <a:endParaRPr lang="ko-KR" altLang="en-US" dirty="0"/>
+          </a:p>
+        </p:txBody>
+      </p:sp>
+      <p:sp>
+        <p:nvSpPr>
+          <p:cNvPr id="48" name="직사각형 47">
+            <a:extLst>
+              <a:ext uri="{FF2B5EF4-FFF2-40B4-BE49-F238E27FC236}">
+                <a16:creationId xmlns:a16="http://schemas.microsoft.com/office/drawing/2014/main" id="{719DACBD-978D-C615-7DDF-62ADFC0927E2}"/>
+              </a:ext>
+            </a:extLst>
+          </p:cNvPr>
+          <p:cNvSpPr/>
+          <p:nvPr/>
+        </p:nvSpPr>
+        <p:spPr>
+          <a:xfrm>
+            <a:off x="4073262" y="1652651"/>
+            <a:ext cx="565925" cy="541752"/>
+          </a:xfrm>
+          <a:prstGeom prst="rect">
+            <a:avLst/>
+          </a:prstGeom>
+          <a:solidFill>
+            <a:schemeClr val="bg1">
+              <a:lumMod val="75000"/>
+            </a:schemeClr>
+          </a:solidFill>
+        </p:spPr>
+        <p:style>
+          <a:lnRef idx="2">
+            <a:schemeClr val="accent3">
+              <a:shade val="15000"/>
+            </a:schemeClr>
+          </a:lnRef>
+          <a:fillRef idx="1">
+            <a:schemeClr val="accent3"/>
+          </a:fillRef>
+          <a:effectRef idx="0">
+            <a:schemeClr val="accent3"/>
+          </a:effectRef>
+          <a:fontRef idx="minor">
+            <a:schemeClr val="lt1"/>
+          </a:fontRef>
+        </p:style>
+        <p:txBody>
+          <a:bodyPr wrap="none" rtlCol="0" anchor="ctr"/>
+          <a:lstStyle/>
+          <a:p>
+            <a:pPr algn="ctr"/>
+            <a:r>
+              <a:rPr lang="en-US" altLang="ko-KR" dirty="0"/>
+              <a:t>Icon</a:t>
+            </a:r>
+            <a:endParaRPr lang="ko-KR" altLang="en-US" dirty="0"/>
+          </a:p>
+        </p:txBody>
+      </p:sp>
+      <p:sp>
+        <p:nvSpPr>
+          <p:cNvPr id="49" name="직사각형 48">
+            <a:extLst>
+              <a:ext uri="{FF2B5EF4-FFF2-40B4-BE49-F238E27FC236}">
+                <a16:creationId xmlns:a16="http://schemas.microsoft.com/office/drawing/2014/main" id="{01DBD141-1E53-35B0-A982-281E8D673FA2}"/>
+              </a:ext>
+            </a:extLst>
+          </p:cNvPr>
+          <p:cNvSpPr/>
+          <p:nvPr/>
+        </p:nvSpPr>
+        <p:spPr>
+          <a:xfrm>
+            <a:off x="4755619" y="1652651"/>
+            <a:ext cx="565925" cy="541752"/>
+          </a:xfrm>
+          <a:prstGeom prst="rect">
+            <a:avLst/>
+          </a:prstGeom>
+          <a:solidFill>
+            <a:schemeClr val="bg1">
+              <a:lumMod val="75000"/>
+            </a:schemeClr>
+          </a:solidFill>
+        </p:spPr>
+        <p:style>
+          <a:lnRef idx="2">
+            <a:schemeClr val="accent3">
+              <a:shade val="15000"/>
+            </a:schemeClr>
+          </a:lnRef>
+          <a:fillRef idx="1">
+            <a:schemeClr val="accent3"/>
+          </a:fillRef>
+          <a:effectRef idx="0">
+            <a:schemeClr val="accent3"/>
+          </a:effectRef>
+          <a:fontRef idx="minor">
+            <a:schemeClr val="lt1"/>
+          </a:fontRef>
+        </p:style>
+        <p:txBody>
+          <a:bodyPr wrap="none" rtlCol="0" anchor="ctr"/>
+          <a:lstStyle/>
+          <a:p>
+            <a:pPr algn="ctr"/>
+            <a:r>
+              <a:rPr lang="en-US" altLang="ko-KR" dirty="0"/>
+              <a:t>Icon</a:t>
+            </a:r>
+            <a:endParaRPr lang="ko-KR" altLang="en-US" dirty="0"/>
+          </a:p>
+        </p:txBody>
+      </p:sp>
+      <p:sp>
+        <p:nvSpPr>
+          <p:cNvPr id="50" name="직사각형 49">
+            <a:extLst>
+              <a:ext uri="{FF2B5EF4-FFF2-40B4-BE49-F238E27FC236}">
+                <a16:creationId xmlns:a16="http://schemas.microsoft.com/office/drawing/2014/main" id="{134B37D3-730D-3AF0-257E-435B5547D5B2}"/>
+              </a:ext>
+            </a:extLst>
+          </p:cNvPr>
+          <p:cNvSpPr/>
+          <p:nvPr/>
+        </p:nvSpPr>
+        <p:spPr>
+          <a:xfrm>
+            <a:off x="5437976" y="1652651"/>
+            <a:ext cx="565925" cy="541752"/>
+          </a:xfrm>
+          <a:prstGeom prst="rect">
+            <a:avLst/>
+          </a:prstGeom>
+          <a:solidFill>
+            <a:schemeClr val="bg1">
+              <a:lumMod val="75000"/>
+            </a:schemeClr>
+          </a:solidFill>
+        </p:spPr>
+        <p:style>
+          <a:lnRef idx="2">
+            <a:schemeClr val="accent3">
+              <a:shade val="15000"/>
+            </a:schemeClr>
+          </a:lnRef>
+          <a:fillRef idx="1">
+            <a:schemeClr val="accent3"/>
+          </a:fillRef>
+          <a:effectRef idx="0">
+            <a:schemeClr val="accent3"/>
+          </a:effectRef>
+          <a:fontRef idx="minor">
+            <a:schemeClr val="lt1"/>
+          </a:fontRef>
+        </p:style>
+        <p:txBody>
+          <a:bodyPr wrap="none" rtlCol="0" anchor="ctr"/>
+          <a:lstStyle/>
+          <a:p>
+            <a:pPr algn="ctr"/>
+            <a:r>
+              <a:rPr lang="en-US" altLang="ko-KR" dirty="0"/>
+              <a:t>Icon</a:t>
+            </a:r>
+            <a:endParaRPr lang="ko-KR" altLang="en-US" dirty="0"/>
+          </a:p>
+        </p:txBody>
+      </p:sp>
+      <p:sp>
+        <p:nvSpPr>
+          <p:cNvPr id="51" name="직사각형 50">
+            <a:extLst>
+              <a:ext uri="{FF2B5EF4-FFF2-40B4-BE49-F238E27FC236}">
+                <a16:creationId xmlns:a16="http://schemas.microsoft.com/office/drawing/2014/main" id="{FC01F430-CCBB-E838-E606-02E5CA4E0F22}"/>
+              </a:ext>
+            </a:extLst>
+          </p:cNvPr>
+          <p:cNvSpPr/>
+          <p:nvPr/>
+        </p:nvSpPr>
+        <p:spPr>
+          <a:xfrm>
+            <a:off x="6120333" y="1652651"/>
+            <a:ext cx="565925" cy="541752"/>
+          </a:xfrm>
+          <a:prstGeom prst="rect">
+            <a:avLst/>
+          </a:prstGeom>
+          <a:solidFill>
+            <a:schemeClr val="bg1">
+              <a:lumMod val="75000"/>
+            </a:schemeClr>
+          </a:solidFill>
+        </p:spPr>
+        <p:style>
+          <a:lnRef idx="2">
+            <a:schemeClr val="accent3">
+              <a:shade val="15000"/>
+            </a:schemeClr>
+          </a:lnRef>
+          <a:fillRef idx="1">
+            <a:schemeClr val="accent3"/>
+          </a:fillRef>
+          <a:effectRef idx="0">
+            <a:schemeClr val="accent3"/>
+          </a:effectRef>
+          <a:fontRef idx="minor">
+            <a:schemeClr val="lt1"/>
+          </a:fontRef>
+        </p:style>
+        <p:txBody>
+          <a:bodyPr wrap="none" rtlCol="0" anchor="ctr"/>
+          <a:lstStyle/>
+          <a:p>
+            <a:pPr algn="ctr"/>
+            <a:r>
+              <a:rPr lang="en-US" altLang="ko-KR" dirty="0"/>
+              <a:t>Icon</a:t>
+            </a:r>
+            <a:endParaRPr lang="ko-KR" altLang="en-US" dirty="0"/>
+          </a:p>
+        </p:txBody>
+      </p:sp>
+      <p:sp>
+        <p:nvSpPr>
+          <p:cNvPr id="52" name="직사각형 51">
+            <a:extLst>
+              <a:ext uri="{FF2B5EF4-FFF2-40B4-BE49-F238E27FC236}">
+                <a16:creationId xmlns:a16="http://schemas.microsoft.com/office/drawing/2014/main" id="{F88089C3-57B3-9479-F3F1-8186A51B7EB5}"/>
+              </a:ext>
+            </a:extLst>
+          </p:cNvPr>
+          <p:cNvSpPr/>
+          <p:nvPr/>
+        </p:nvSpPr>
+        <p:spPr>
+          <a:xfrm>
+            <a:off x="6807335" y="1652651"/>
+            <a:ext cx="565925" cy="541752"/>
+          </a:xfrm>
+          <a:prstGeom prst="rect">
+            <a:avLst/>
+          </a:prstGeom>
+          <a:solidFill>
+            <a:schemeClr val="bg1">
+              <a:lumMod val="75000"/>
+            </a:schemeClr>
+          </a:solidFill>
+        </p:spPr>
+        <p:style>
+          <a:lnRef idx="2">
+            <a:schemeClr val="accent3">
+              <a:shade val="15000"/>
+            </a:schemeClr>
+          </a:lnRef>
+          <a:fillRef idx="1">
+            <a:schemeClr val="accent3"/>
+          </a:fillRef>
+          <a:effectRef idx="0">
+            <a:schemeClr val="accent3"/>
+          </a:effectRef>
+          <a:fontRef idx="minor">
+            <a:schemeClr val="lt1"/>
+          </a:fontRef>
+        </p:style>
+        <p:txBody>
+          <a:bodyPr wrap="none" rtlCol="0" anchor="ctr"/>
+          <a:lstStyle/>
+          <a:p>
+            <a:pPr algn="ctr"/>
+            <a:r>
+              <a:rPr lang="en-US" altLang="ko-KR" dirty="0"/>
+              <a:t>Icon</a:t>
+            </a:r>
+            <a:endParaRPr lang="ko-KR" altLang="en-US" dirty="0"/>
+          </a:p>
+        </p:txBody>
+      </p:sp>
+      <p:sp>
+        <p:nvSpPr>
+          <p:cNvPr id="53" name="직사각형 52">
+            <a:extLst>
+              <a:ext uri="{FF2B5EF4-FFF2-40B4-BE49-F238E27FC236}">
+                <a16:creationId xmlns:a16="http://schemas.microsoft.com/office/drawing/2014/main" id="{8345B844-AA68-09D1-A63A-A58A542F1BD9}"/>
+              </a:ext>
+            </a:extLst>
+          </p:cNvPr>
+          <p:cNvSpPr/>
+          <p:nvPr/>
+        </p:nvSpPr>
+        <p:spPr>
+          <a:xfrm>
+            <a:off x="4073262" y="2290581"/>
+            <a:ext cx="565925" cy="541752"/>
+          </a:xfrm>
+          <a:prstGeom prst="rect">
+            <a:avLst/>
+          </a:prstGeom>
+          <a:solidFill>
+            <a:schemeClr val="bg1">
+              <a:lumMod val="75000"/>
+            </a:schemeClr>
+          </a:solidFill>
+        </p:spPr>
+        <p:style>
+          <a:lnRef idx="2">
+            <a:schemeClr val="accent3">
+              <a:shade val="15000"/>
+            </a:schemeClr>
+          </a:lnRef>
+          <a:fillRef idx="1">
+            <a:schemeClr val="accent3"/>
+          </a:fillRef>
+          <a:effectRef idx="0">
+            <a:schemeClr val="accent3"/>
+          </a:effectRef>
+          <a:fontRef idx="minor">
+            <a:schemeClr val="lt1"/>
+          </a:fontRef>
+        </p:style>
+        <p:txBody>
+          <a:bodyPr wrap="none" rtlCol="0" anchor="ctr"/>
+          <a:lstStyle/>
+          <a:p>
+            <a:pPr algn="ctr"/>
+            <a:r>
+              <a:rPr lang="en-US" altLang="ko-KR" dirty="0"/>
+              <a:t>Icon</a:t>
+            </a:r>
+            <a:endParaRPr lang="ko-KR" altLang="en-US" dirty="0"/>
+          </a:p>
+        </p:txBody>
+      </p:sp>
+      <p:sp>
+        <p:nvSpPr>
+          <p:cNvPr id="54" name="직사각형 53">
+            <a:extLst>
+              <a:ext uri="{FF2B5EF4-FFF2-40B4-BE49-F238E27FC236}">
+                <a16:creationId xmlns:a16="http://schemas.microsoft.com/office/drawing/2014/main" id="{CD309F07-EA42-89CE-760C-7DE144D93353}"/>
+              </a:ext>
+            </a:extLst>
+          </p:cNvPr>
+          <p:cNvSpPr/>
+          <p:nvPr/>
+        </p:nvSpPr>
+        <p:spPr>
+          <a:xfrm>
+            <a:off x="4755619" y="2290581"/>
+            <a:ext cx="565925" cy="541752"/>
+          </a:xfrm>
+          <a:prstGeom prst="rect">
+            <a:avLst/>
+          </a:prstGeom>
+          <a:solidFill>
+            <a:schemeClr val="bg1">
+              <a:lumMod val="75000"/>
+            </a:schemeClr>
+          </a:solidFill>
+        </p:spPr>
+        <p:style>
+          <a:lnRef idx="2">
+            <a:schemeClr val="accent3">
+              <a:shade val="15000"/>
+            </a:schemeClr>
+          </a:lnRef>
+          <a:fillRef idx="1">
+            <a:schemeClr val="accent3"/>
+          </a:fillRef>
+          <a:effectRef idx="0">
+            <a:schemeClr val="accent3"/>
+          </a:effectRef>
+          <a:fontRef idx="minor">
+            <a:schemeClr val="lt1"/>
+          </a:fontRef>
+        </p:style>
+        <p:txBody>
+          <a:bodyPr wrap="none" rtlCol="0" anchor="ctr"/>
+          <a:lstStyle/>
+          <a:p>
+            <a:pPr algn="ctr"/>
+            <a:r>
+              <a:rPr lang="en-US" altLang="ko-KR" dirty="0"/>
+              <a:t>Icon</a:t>
+            </a:r>
+            <a:endParaRPr lang="ko-KR" altLang="en-US" dirty="0"/>
+          </a:p>
+        </p:txBody>
+      </p:sp>
+      <p:sp>
+        <p:nvSpPr>
+          <p:cNvPr id="55" name="직사각형 54">
+            <a:extLst>
+              <a:ext uri="{FF2B5EF4-FFF2-40B4-BE49-F238E27FC236}">
+                <a16:creationId xmlns:a16="http://schemas.microsoft.com/office/drawing/2014/main" id="{45CEA00E-0B6C-BB2F-70BF-0290AE5C83CF}"/>
+              </a:ext>
+            </a:extLst>
+          </p:cNvPr>
+          <p:cNvSpPr/>
+          <p:nvPr/>
+        </p:nvSpPr>
+        <p:spPr>
+          <a:xfrm>
+            <a:off x="5437976" y="2290581"/>
+            <a:ext cx="565925" cy="541752"/>
+          </a:xfrm>
+          <a:prstGeom prst="rect">
+            <a:avLst/>
+          </a:prstGeom>
+          <a:solidFill>
+            <a:schemeClr val="bg1">
+              <a:lumMod val="75000"/>
+            </a:schemeClr>
+          </a:solidFill>
+        </p:spPr>
+        <p:style>
+          <a:lnRef idx="2">
+            <a:schemeClr val="accent3">
+              <a:shade val="15000"/>
+            </a:schemeClr>
+          </a:lnRef>
+          <a:fillRef idx="1">
+            <a:schemeClr val="accent3"/>
+          </a:fillRef>
+          <a:effectRef idx="0">
+            <a:schemeClr val="accent3"/>
+          </a:effectRef>
+          <a:fontRef idx="minor">
+            <a:schemeClr val="lt1"/>
+          </a:fontRef>
+        </p:style>
+        <p:txBody>
+          <a:bodyPr wrap="none" rtlCol="0" anchor="ctr"/>
+          <a:lstStyle/>
+          <a:p>
+            <a:pPr algn="ctr"/>
+            <a:r>
+              <a:rPr lang="en-US" altLang="ko-KR" dirty="0"/>
+              <a:t>Icon</a:t>
+            </a:r>
+            <a:endParaRPr lang="ko-KR" altLang="en-US" dirty="0"/>
+          </a:p>
+        </p:txBody>
+      </p:sp>
+      <p:sp>
+        <p:nvSpPr>
+          <p:cNvPr id="56" name="직사각형 55">
+            <a:extLst>
+              <a:ext uri="{FF2B5EF4-FFF2-40B4-BE49-F238E27FC236}">
+                <a16:creationId xmlns:a16="http://schemas.microsoft.com/office/drawing/2014/main" id="{7D191471-2B6B-AA9D-59DB-A2D8D5EFF753}"/>
+              </a:ext>
+            </a:extLst>
+          </p:cNvPr>
+          <p:cNvSpPr/>
+          <p:nvPr/>
+        </p:nvSpPr>
+        <p:spPr>
+          <a:xfrm>
+            <a:off x="6120333" y="2290581"/>
+            <a:ext cx="565925" cy="541752"/>
+          </a:xfrm>
+          <a:prstGeom prst="rect">
+            <a:avLst/>
+          </a:prstGeom>
+          <a:solidFill>
+            <a:schemeClr val="bg1">
+              <a:lumMod val="75000"/>
+            </a:schemeClr>
+          </a:solidFill>
+        </p:spPr>
+        <p:style>
+          <a:lnRef idx="2">
+            <a:schemeClr val="accent3">
+              <a:shade val="15000"/>
+            </a:schemeClr>
+          </a:lnRef>
+          <a:fillRef idx="1">
+            <a:schemeClr val="accent3"/>
+          </a:fillRef>
+          <a:effectRef idx="0">
+            <a:schemeClr val="accent3"/>
+          </a:effectRef>
+          <a:fontRef idx="minor">
+            <a:schemeClr val="lt1"/>
+          </a:fontRef>
+        </p:style>
+        <p:txBody>
+          <a:bodyPr wrap="none" rtlCol="0" anchor="ctr"/>
+          <a:lstStyle/>
+          <a:p>
+            <a:pPr algn="ctr"/>
+            <a:r>
+              <a:rPr lang="en-US" altLang="ko-KR" dirty="0"/>
+              <a:t>Icon</a:t>
+            </a:r>
+            <a:endParaRPr lang="ko-KR" altLang="en-US" dirty="0"/>
+          </a:p>
+        </p:txBody>
+      </p:sp>
+      <p:sp>
+        <p:nvSpPr>
+          <p:cNvPr id="57" name="직사각형 56">
+            <a:extLst>
+              <a:ext uri="{FF2B5EF4-FFF2-40B4-BE49-F238E27FC236}">
+                <a16:creationId xmlns:a16="http://schemas.microsoft.com/office/drawing/2014/main" id="{75FA524E-941F-9986-BF91-84454E65D812}"/>
+              </a:ext>
+            </a:extLst>
+          </p:cNvPr>
+          <p:cNvSpPr/>
+          <p:nvPr/>
+        </p:nvSpPr>
+        <p:spPr>
+          <a:xfrm>
+            <a:off x="6807335" y="2290581"/>
+            <a:ext cx="565925" cy="541752"/>
+          </a:xfrm>
+          <a:prstGeom prst="rect">
+            <a:avLst/>
+          </a:prstGeom>
+          <a:solidFill>
+            <a:schemeClr val="bg1">
+              <a:lumMod val="75000"/>
+            </a:schemeClr>
+          </a:solidFill>
+        </p:spPr>
+        <p:style>
+          <a:lnRef idx="2">
+            <a:schemeClr val="accent3">
+              <a:shade val="15000"/>
+            </a:schemeClr>
+          </a:lnRef>
+          <a:fillRef idx="1">
+            <a:schemeClr val="accent3"/>
+          </a:fillRef>
+          <a:effectRef idx="0">
+            <a:schemeClr val="accent3"/>
+          </a:effectRef>
+          <a:fontRef idx="minor">
+            <a:schemeClr val="lt1"/>
+          </a:fontRef>
+        </p:style>
+        <p:txBody>
+          <a:bodyPr wrap="none" rtlCol="0" anchor="ctr"/>
+          <a:lstStyle/>
+          <a:p>
+            <a:pPr algn="ctr"/>
+            <a:r>
+              <a:rPr lang="en-US" altLang="ko-KR" dirty="0"/>
+              <a:t>Icon</a:t>
+            </a:r>
+            <a:endParaRPr lang="ko-KR" altLang="en-US" dirty="0"/>
+          </a:p>
+        </p:txBody>
+      </p:sp>
+      <p:sp>
+        <p:nvSpPr>
+          <p:cNvPr id="58" name="직사각형 57">
+            <a:extLst>
+              <a:ext uri="{FF2B5EF4-FFF2-40B4-BE49-F238E27FC236}">
+                <a16:creationId xmlns:a16="http://schemas.microsoft.com/office/drawing/2014/main" id="{A9C1C69D-6F9D-4A20-6D94-219107042B17}"/>
+              </a:ext>
+            </a:extLst>
+          </p:cNvPr>
+          <p:cNvSpPr/>
+          <p:nvPr/>
+        </p:nvSpPr>
+        <p:spPr>
+          <a:xfrm>
+            <a:off x="4073262" y="2928511"/>
+            <a:ext cx="565925" cy="541752"/>
+          </a:xfrm>
+          <a:prstGeom prst="rect">
+            <a:avLst/>
+          </a:prstGeom>
+          <a:solidFill>
+            <a:schemeClr val="bg1">
+              <a:lumMod val="75000"/>
+            </a:schemeClr>
+          </a:solidFill>
+        </p:spPr>
+        <p:style>
+          <a:lnRef idx="2">
+            <a:schemeClr val="accent3">
+              <a:shade val="15000"/>
+            </a:schemeClr>
+          </a:lnRef>
+          <a:fillRef idx="1">
+            <a:schemeClr val="accent3"/>
+          </a:fillRef>
+          <a:effectRef idx="0">
+            <a:schemeClr val="accent3"/>
+          </a:effectRef>
+          <a:fontRef idx="minor">
+            <a:schemeClr val="lt1"/>
+          </a:fontRef>
+        </p:style>
+        <p:txBody>
+          <a:bodyPr wrap="none" rtlCol="0" anchor="ctr"/>
+          <a:lstStyle/>
+          <a:p>
+            <a:pPr algn="ctr"/>
+            <a:r>
+              <a:rPr lang="en-US" altLang="ko-KR" dirty="0"/>
+              <a:t>Icon</a:t>
+            </a:r>
+            <a:endParaRPr lang="ko-KR" altLang="en-US" dirty="0"/>
+          </a:p>
+        </p:txBody>
+      </p:sp>
+      <p:sp>
+        <p:nvSpPr>
+          <p:cNvPr id="59" name="직사각형 58">
+            <a:extLst>
+              <a:ext uri="{FF2B5EF4-FFF2-40B4-BE49-F238E27FC236}">
+                <a16:creationId xmlns:a16="http://schemas.microsoft.com/office/drawing/2014/main" id="{1B37546C-B9D5-9FFC-8364-1BF08E1BBEEC}"/>
+              </a:ext>
+            </a:extLst>
+          </p:cNvPr>
+          <p:cNvSpPr/>
+          <p:nvPr/>
+        </p:nvSpPr>
+        <p:spPr>
+          <a:xfrm>
+            <a:off x="4755619" y="2928511"/>
+            <a:ext cx="565925" cy="541752"/>
+          </a:xfrm>
+          <a:prstGeom prst="rect">
+            <a:avLst/>
+          </a:prstGeom>
+          <a:solidFill>
+            <a:schemeClr val="bg1">
+              <a:lumMod val="75000"/>
+            </a:schemeClr>
+          </a:solidFill>
+        </p:spPr>
+        <p:style>
+          <a:lnRef idx="2">
+            <a:schemeClr val="accent3">
+              <a:shade val="15000"/>
+            </a:schemeClr>
+          </a:lnRef>
+          <a:fillRef idx="1">
+            <a:schemeClr val="accent3"/>
+          </a:fillRef>
+          <a:effectRef idx="0">
+            <a:schemeClr val="accent3"/>
+          </a:effectRef>
+          <a:fontRef idx="minor">
+            <a:schemeClr val="lt1"/>
+          </a:fontRef>
+        </p:style>
+        <p:txBody>
+          <a:bodyPr wrap="none" rtlCol="0" anchor="ctr"/>
+          <a:lstStyle/>
+          <a:p>
+            <a:pPr algn="ctr"/>
+            <a:r>
+              <a:rPr lang="en-US" altLang="ko-KR" dirty="0"/>
+              <a:t>Icon</a:t>
+            </a:r>
+            <a:endParaRPr lang="ko-KR" altLang="en-US" dirty="0"/>
+          </a:p>
+        </p:txBody>
+      </p:sp>
+      <p:sp>
+        <p:nvSpPr>
+          <p:cNvPr id="60" name="직사각형 59">
+            <a:extLst>
+              <a:ext uri="{FF2B5EF4-FFF2-40B4-BE49-F238E27FC236}">
+                <a16:creationId xmlns:a16="http://schemas.microsoft.com/office/drawing/2014/main" id="{74BE69FB-105D-ADB5-5B83-B3B32001446F}"/>
+              </a:ext>
+            </a:extLst>
+          </p:cNvPr>
+          <p:cNvSpPr/>
+          <p:nvPr/>
+        </p:nvSpPr>
+        <p:spPr>
+          <a:xfrm>
+            <a:off x="5437976" y="2928511"/>
+            <a:ext cx="565925" cy="541752"/>
+          </a:xfrm>
+          <a:prstGeom prst="rect">
+            <a:avLst/>
+          </a:prstGeom>
+          <a:solidFill>
+            <a:schemeClr val="bg1">
+              <a:lumMod val="75000"/>
+            </a:schemeClr>
+          </a:solidFill>
+        </p:spPr>
+        <p:style>
+          <a:lnRef idx="2">
+            <a:schemeClr val="accent3">
+              <a:shade val="15000"/>
+            </a:schemeClr>
+          </a:lnRef>
+          <a:fillRef idx="1">
+            <a:schemeClr val="accent3"/>
+          </a:fillRef>
+          <a:effectRef idx="0">
+            <a:schemeClr val="accent3"/>
+          </a:effectRef>
+          <a:fontRef idx="minor">
+            <a:schemeClr val="lt1"/>
+          </a:fontRef>
+        </p:style>
+        <p:txBody>
+          <a:bodyPr wrap="none" rtlCol="0" anchor="ctr"/>
+          <a:lstStyle/>
+          <a:p>
+            <a:pPr algn="ctr"/>
+            <a:r>
+              <a:rPr lang="en-US" altLang="ko-KR" dirty="0"/>
+              <a:t>Icon</a:t>
+            </a:r>
+            <a:endParaRPr lang="ko-KR" altLang="en-US" dirty="0"/>
+          </a:p>
+        </p:txBody>
+      </p:sp>
+      <p:sp>
+        <p:nvSpPr>
+          <p:cNvPr id="64" name="TextBox 63">
+            <a:extLst>
+              <a:ext uri="{FF2B5EF4-FFF2-40B4-BE49-F238E27FC236}">
+                <a16:creationId xmlns:a16="http://schemas.microsoft.com/office/drawing/2014/main" id="{998B813C-D25B-A0A7-5E04-EB211203D25D}"/>
+              </a:ext>
+            </a:extLst>
+          </p:cNvPr>
+          <p:cNvSpPr txBox="1"/>
+          <p:nvPr/>
+        </p:nvSpPr>
+        <p:spPr>
+          <a:xfrm>
+            <a:off x="1341589" y="473044"/>
+            <a:ext cx="8785704" cy="369332"/>
+          </a:xfrm>
+          <a:prstGeom prst="rect">
+            <a:avLst/>
+          </a:prstGeom>
+          <a:noFill/>
+        </p:spPr>
+        <p:txBody>
+          <a:bodyPr wrap="square">
+            <a:spAutoFit/>
+          </a:bodyPr>
+          <a:lstStyle/>
+          <a:p>
+            <a:r>
+              <a:rPr lang="en-US" altLang="ko-KR" dirty="0"/>
+              <a:t>※ </a:t>
+            </a:r>
+            <a:r>
+              <a:rPr lang="ko-KR" altLang="en-US" dirty="0"/>
+              <a:t>선택한 아이템이 없으면 리스트가 하단으로 확장되어 표시</a:t>
+            </a:r>
+            <a:r>
+              <a:rPr lang="en-US" altLang="ko-KR" dirty="0"/>
+              <a:t>. (</a:t>
+            </a:r>
+            <a:r>
+              <a:rPr lang="ko-KR" altLang="en-US" dirty="0"/>
+              <a:t>상세 정보 부분 제거</a:t>
+            </a:r>
+            <a:r>
+              <a:rPr lang="en-US" altLang="ko-KR" dirty="0"/>
+              <a:t>)</a:t>
+            </a:r>
             <a:endParaRPr lang="ko-KR" altLang="en-US" dirty="0"/>
           </a:p>
         </p:txBody>
@@ -5746,7 +8895,7 @@
     </p:spTree>
     <p:extLst>
       <p:ext uri="{BB962C8B-B14F-4D97-AF65-F5344CB8AC3E}">
-        <p14:creationId xmlns:p14="http://schemas.microsoft.com/office/powerpoint/2010/main" val="792640323"/>
+        <p14:creationId xmlns:p14="http://schemas.microsoft.com/office/powerpoint/2010/main" val="3015130354"/>
       </p:ext>
     </p:extLst>
   </p:cSld>
